--- a/Y9_Exploring_Science/9C_Threat_from_disease/9C_L05_Medians_and_quartiles.pptx
+++ b/Y9_Exploring_Science/9C_Threat_from_disease/9C_L05_Medians_and_quartiles.pptx
@@ -131,7 +131,7 @@
           <a:lstStyle/>
           <a:p>
             <a:pPr>
-              <a:defRPr sz="1400" b="0" i="0" u="none" strike="noStrike">
+              <a:defRPr sz="1600" b="0" i="0" u="none" strike="noStrike">
                 <a:solidFill>
                   <a:srgbClr val="0F2A5F"/>
                 </a:solidFill>
@@ -139,7 +139,7 @@
               </a:defRPr>
             </a:pPr>
             <a:r>
-              <a:rPr sz="1400" b="0" i="0" u="none" strike="noStrike">
+              <a:rPr sz="1600" b="0" i="0" u="none" strike="noStrike">
                 <a:solidFill>
                   <a:srgbClr val="0F2A5F"/>
                 </a:solidFill>
@@ -188,7 +188,7 @@
               <a:lstStyle/>
               <a:p>
                 <a:pPr>
-                  <a:defRPr b="0" i="0" strike="noStrike" sz="1000" u="none">
+                  <a:defRPr b="0" i="0" strike="noStrike" sz="1200" u="none">
                     <a:solidFill>
                       <a:srgbClr val="141B26"/>
                     </a:solidFill>
@@ -313,7 +313,7 @@
               <a:lstStyle/>
               <a:p>
                 <a:pPr>
-                  <a:defRPr b="0" i="0" strike="noStrike" sz="1000" u="none">
+                  <a:defRPr b="0" i="0" strike="noStrike" sz="1200" u="none">
                     <a:solidFill>
                       <a:srgbClr val="141B26"/>
                     </a:solidFill>
@@ -417,7 +417,7 @@
             <a:lstStyle/>
             <a:p>
               <a:pPr>
-                <a:defRPr b="0" i="0" strike="noStrike" sz="1000" u="none">
+                <a:defRPr b="0" i="0" strike="noStrike" sz="1200" u="none">
                   <a:solidFill>
                     <a:srgbClr val="141B26"/>
                   </a:solidFill>
@@ -454,7 +454,7 @@
               <a:lstStyle/>
               <a:p>
                 <a:pPr>
-                  <a:defRPr sz="1100" b="0" i="0" u="none" strike="noStrike">
+                  <a:defRPr sz="1300" b="0" i="0" u="none" strike="noStrike">
                     <a:solidFill>
                       <a:srgbClr val="141B26"/>
                     </a:solidFill>
@@ -462,7 +462,7 @@
                   </a:defRPr>
                 </a:pPr>
                 <a:r>
-                  <a:rPr sz="1100" b="0" i="0" u="none" strike="noStrike">
+                  <a:rPr sz="1300" b="0" i="0" u="none" strike="noStrike">
                     <a:solidFill>
                       <a:srgbClr val="141B26"/>
                     </a:solidFill>
@@ -494,7 +494,7 @@
           <a:lstStyle/>
           <a:p>
             <a:pPr>
-              <a:defRPr sz="1100" b="0" i="0" u="none" strike="noStrike">
+              <a:defRPr sz="1300" b="0" i="0" u="none" strike="noStrike">
                 <a:solidFill>
                   <a:srgbClr val="141B26"/>
                 </a:solidFill>
@@ -535,7 +535,7 @@
               <a:lstStyle/>
               <a:p>
                 <a:pPr>
-                  <a:defRPr sz="1100" b="0" i="0" u="none" strike="noStrike">
+                  <a:defRPr sz="1300" b="0" i="0" u="none" strike="noStrike">
                     <a:solidFill>
                       <a:srgbClr val="141B26"/>
                     </a:solidFill>
@@ -543,7 +543,7 @@
                   </a:defRPr>
                 </a:pPr>
                 <a:r>
-                  <a:rPr sz="1100" b="0" i="0" u="none" strike="noStrike">
+                  <a:rPr sz="1300" b="0" i="0" u="none" strike="noStrike">
                     <a:solidFill>
                       <a:srgbClr val="141B26"/>
                     </a:solidFill>
@@ -575,7 +575,7 @@
           <a:lstStyle/>
           <a:p>
             <a:pPr>
-              <a:defRPr sz="1100" b="0" i="0" u="none" strike="noStrike">
+              <a:defRPr sz="1300" b="0" i="0" u="none" strike="noStrike">
                 <a:solidFill>
                   <a:srgbClr val="141B26"/>
                 </a:solidFill>
@@ -605,7 +605,7 @@
         <a:lstStyle/>
         <a:p>
           <a:pPr>
-            <a:defRPr sz="1100">
+            <a:defRPr sz="1300">
               <a:latin typeface="+mn-lt"/>
               <a:cs typeface="+mn-lt"/>
             </a:defRPr>
@@ -642,7 +642,7 @@
           <a:lstStyle/>
           <a:p>
             <a:pPr>
-              <a:defRPr sz="1400" b="0" i="0" u="none" strike="noStrike">
+              <a:defRPr sz="1600" b="0" i="0" u="none" strike="noStrike">
                 <a:solidFill>
                   <a:srgbClr val="0F2A5F"/>
                 </a:solidFill>
@@ -650,7 +650,7 @@
               </a:defRPr>
             </a:pPr>
             <a:r>
-              <a:rPr sz="1400" b="0" i="0" u="none" strike="noStrike">
+              <a:rPr sz="1600" b="0" i="0" u="none" strike="noStrike">
                 <a:solidFill>
                   <a:srgbClr val="0F2A5F"/>
                 </a:solidFill>
@@ -699,7 +699,7 @@
               <a:lstStyle/>
               <a:p>
                 <a:pPr>
-                  <a:defRPr b="0" i="0" strike="noStrike" sz="1000" u="none">
+                  <a:defRPr b="0" i="0" strike="noStrike" sz="1200" u="none">
                     <a:solidFill>
                       <a:srgbClr val="141B26"/>
                     </a:solidFill>
@@ -767,7 +767,7 @@
             <a:lstStyle/>
             <a:p>
               <a:pPr>
-                <a:defRPr b="0" i="0" strike="noStrike" sz="1000" u="none">
+                <a:defRPr b="0" i="0" strike="noStrike" sz="1200" u="none">
                   <a:solidFill>
                     <a:srgbClr val="141B26"/>
                   </a:solidFill>
@@ -804,7 +804,7 @@
               <a:lstStyle/>
               <a:p>
                 <a:pPr>
-                  <a:defRPr sz="1100" b="0" i="0" u="none" strike="noStrike">
+                  <a:defRPr sz="1300" b="0" i="0" u="none" strike="noStrike">
                     <a:solidFill>
                       <a:srgbClr val="141B26"/>
                     </a:solidFill>
@@ -812,7 +812,7 @@
                   </a:defRPr>
                 </a:pPr>
                 <a:r>
-                  <a:rPr sz="1100" b="0" i="0" u="none" strike="noStrike">
+                  <a:rPr sz="1300" b="0" i="0" u="none" strike="noStrike">
                     <a:solidFill>
                       <a:srgbClr val="141B26"/>
                     </a:solidFill>
@@ -844,7 +844,7 @@
           <a:lstStyle/>
           <a:p>
             <a:pPr>
-              <a:defRPr sz="1100" b="0" i="0" u="none" strike="noStrike">
+              <a:defRPr sz="1300" b="0" i="0" u="none" strike="noStrike">
                 <a:solidFill>
                   <a:srgbClr val="141B26"/>
                 </a:solidFill>
@@ -885,7 +885,7 @@
               <a:lstStyle/>
               <a:p>
                 <a:pPr>
-                  <a:defRPr sz="1100" b="0" i="0" u="none" strike="noStrike">
+                  <a:defRPr sz="1300" b="0" i="0" u="none" strike="noStrike">
                     <a:solidFill>
                       <a:srgbClr val="141B26"/>
                     </a:solidFill>
@@ -893,7 +893,7 @@
                   </a:defRPr>
                 </a:pPr>
                 <a:r>
-                  <a:rPr sz="1100" b="0" i="0" u="none" strike="noStrike">
+                  <a:rPr sz="1300" b="0" i="0" u="none" strike="noStrike">
                     <a:solidFill>
                       <a:srgbClr val="141B26"/>
                     </a:solidFill>
@@ -925,7 +925,7 @@
           <a:lstStyle/>
           <a:p>
             <a:pPr>
-              <a:defRPr sz="1100" b="0" i="0" u="none" strike="noStrike">
+              <a:defRPr sz="1300" b="0" i="0" u="none" strike="noStrike">
                 <a:solidFill>
                   <a:srgbClr val="141B26"/>
                 </a:solidFill>
@@ -2584,7 +2584,7 @@
         <p:spPr>
           <a:xfrm>
             <a:off x="548640" y="3657600"/>
-            <a:ext cx="10515600" cy="914400"/>
+            <a:ext cx="10515600" cy="1097280"/>
           </a:xfrm>
           <a:prstGeom prst="rect">
             <a:avLst/>
@@ -2597,7 +2597,7 @@
           <a:lstStyle>
             <a:lvl1pPr indent="0" marL="0">
               <a:buNone/>
-              <a:defRPr lang="en-US" sz="2000" dirty="0">
+              <a:defRPr lang="en-US" sz="2400" dirty="0">
                 <a:solidFill>
                   <a:srgbClr val="FFFFFF"/>
                 </a:solidFill>
@@ -2608,7 +2608,7 @@
             <a:pPr indent="0" marL="0">
               <a:buNone/>
             </a:pPr>
-            <a:endParaRPr lang="en-US" sz="2000" dirty="0"/>
+            <a:endParaRPr lang="en-US" sz="2400" dirty="0"/>
           </a:p>
         </p:txBody>
       </p:sp>
@@ -2708,14 +2708,14 @@
               <a:buNone/>
             </a:pPr>
             <a:r>
-              <a:rPr lang="en-US" sz="900" dirty="0">
+              <a:rPr lang="en-US" sz="1000" dirty="0">
                 <a:solidFill>
                   <a:srgbClr val="5B6574"/>
                 </a:solidFill>
               </a:rPr>
               <a:t>Year 9 Science  |  9C Threat from disease  |  Lesson 5: Medians and quartiles</a:t>
             </a:r>
-            <a:endParaRPr lang="en-US" sz="900" dirty="0"/>
+            <a:endParaRPr lang="en-US" sz="1000" dirty="0"/>
           </a:p>
         </p:txBody>
       </p:sp>
@@ -2884,14 +2884,14 @@
               <a:buNone/>
             </a:pPr>
             <a:r>
-              <a:rPr lang="en-US" sz="900" dirty="0">
+              <a:rPr lang="en-US" sz="1000" dirty="0">
                 <a:solidFill>
                   <a:srgbClr val="5B6574"/>
                 </a:solidFill>
               </a:rPr>
               <a:t>Year 9 Science  |  9C Threat from disease  |  Lesson 5: Medians and quartiles</a:t>
             </a:r>
-            <a:endParaRPr lang="en-US" sz="900" dirty="0"/>
+            <a:endParaRPr lang="en-US" sz="1000" dirty="0"/>
           </a:p>
         </p:txBody>
       </p:sp>
@@ -3060,14 +3060,14 @@
               <a:buNone/>
             </a:pPr>
             <a:r>
-              <a:rPr lang="en-US" sz="900" dirty="0">
+              <a:rPr lang="en-US" sz="1000" dirty="0">
                 <a:solidFill>
                   <a:srgbClr val="5B6574"/>
                 </a:solidFill>
               </a:rPr>
               <a:t>Year 9 Science  |  9C Threat from disease  |  Lesson 5: Medians and quartiles</a:t>
             </a:r>
-            <a:endParaRPr lang="en-US" sz="900" dirty="0"/>
+            <a:endParaRPr lang="en-US" sz="1000" dirty="0"/>
           </a:p>
         </p:txBody>
       </p:sp>
@@ -3196,7 +3196,7 @@
           <a:lstStyle>
             <a:lvl1pPr indent="0" marL="0">
               <a:buNone/>
-              <a:defRPr lang="en-US" sz="3000" b="1" dirty="0">
+              <a:defRPr lang="en-US" sz="3400" b="1" dirty="0">
                 <a:solidFill>
                   <a:srgbClr val="3A2E00"/>
                 </a:solidFill>
@@ -3207,7 +3207,7 @@
             <a:pPr indent="0" marL="0">
               <a:buNone/>
             </a:pPr>
-            <a:endParaRPr lang="en-US" sz="3000" dirty="0"/>
+            <a:endParaRPr lang="en-US" sz="3400" dirty="0"/>
           </a:p>
         </p:txBody>
       </p:sp>
@@ -3624,14 +3624,14 @@
               <a:buNone/>
             </a:pPr>
             <a:r>
-              <a:rPr lang="en-US" sz="1300" b="1" spc="200" kern="0" dirty="0">
+              <a:rPr lang="en-US" sz="1400" b="1" spc="200" kern="0" dirty="0">
                 <a:solidFill>
                   <a:srgbClr val="F2CE3E"/>
                 </a:solidFill>
               </a:rPr>
               <a:t>YEAR 9 SCIENCE  ·  9C THREAT FROM DISEASE  ·  LESSON 5 OF 7</a:t>
             </a:r>
-            <a:endParaRPr lang="en-US" sz="1300" dirty="0"/>
+            <a:endParaRPr lang="en-US" sz="1400" dirty="0"/>
           </a:p>
         </p:txBody>
       </p:sp>
@@ -3684,7 +3684,7 @@
         <p:spPr>
           <a:xfrm>
             <a:off x="548640" y="3657600"/>
-            <a:ext cx="10515600" cy="914400"/>
+            <a:ext cx="10515600" cy="1097280"/>
           </a:xfrm>
           <a:prstGeom prst="rect">
             <a:avLst/>
@@ -3700,14 +3700,14 @@
               <a:buNone/>
             </a:pPr>
             <a:r>
-              <a:rPr lang="en-US" sz="2000" dirty="0">
+              <a:rPr lang="en-US" sz="2400" dirty="0">
                 <a:solidFill>
                   <a:srgbClr val="FFFFFF"/>
                 </a:solidFill>
               </a:rPr>
               <a:t>How do scientists tell which patients a medicine really helps?</a:t>
             </a:r>
-            <a:endParaRPr lang="en-US" sz="2000" dirty="0"/>
+            <a:endParaRPr lang="en-US" sz="2400" dirty="0"/>
           </a:p>
         </p:txBody>
       </p:sp>
@@ -3736,14 +3736,14 @@
               <a:buNone/>
             </a:pPr>
             <a:r>
-              <a:rPr lang="en-US" sz="1200" dirty="0">
+              <a:rPr lang="en-US" sz="1400" dirty="0">
                 <a:solidFill>
                   <a:srgbClr val="C9D3E6"/>
                 </a:solidFill>
               </a:rPr>
               <a:t>Exploring Science International 9  ·  Student Book pages 46 to 47  ·  Workbook pages 33</a:t>
             </a:r>
-            <a:endParaRPr lang="en-US" sz="1200" dirty="0"/>
+            <a:endParaRPr lang="en-US" sz="1400" dirty="0"/>
           </a:p>
         </p:txBody>
       </p:sp>
@@ -3922,7 +3922,7 @@
               <a:buNone/>
             </a:pPr>
             <a:r>
-              <a:rPr lang="en-US" sz="1500" b="1" dirty="0">
+              <a:rPr lang="en-US" sz="1800" b="1" dirty="0">
                 <a:solidFill>
                   <a:srgbClr val="7B3A8E"/>
                 </a:solidFill>
@@ -3933,14 +3933,14 @@
               <a:buNone/>
             </a:pPr>
             <a:r>
-              <a:rPr lang="en-US" sz="1500" dirty="0">
+              <a:rPr lang="en-US" sz="1800" dirty="0">
                 <a:solidFill>
                   <a:srgbClr val="141B26"/>
                 </a:solidFill>
               </a:rPr>
               <a:t>Collect the hand spans of the class and find the median, quartiles and interquartile range.</a:t>
             </a:r>
-            <a:endParaRPr lang="en-US" sz="1500" dirty="0"/>
+            <a:endParaRPr lang="en-US" sz="1800" dirty="0"/>
           </a:p>
         </p:txBody>
       </p:sp>
@@ -3969,14 +3969,14 @@
               <a:buNone/>
             </a:pPr>
             <a:r>
-              <a:rPr lang="en-US" sz="1600" b="1" dirty="0">
+              <a:rPr lang="en-US" sz="1800" b="1" dirty="0">
                 <a:solidFill>
                   <a:srgbClr val="0F2A5F"/>
                 </a:solidFill>
               </a:rPr>
               <a:t>Equipment</a:t>
             </a:r>
-            <a:endParaRPr lang="en-US" sz="1600" dirty="0"/>
+            <a:endParaRPr lang="en-US" sz="1800" dirty="0"/>
           </a:p>
         </p:txBody>
       </p:sp>
@@ -3998,218 +3998,214 @@
           <a:ln/>
         </p:spPr>
         <p:txBody>
-          <a:bodyPr wrap="square" lIns="0" tIns="0" rIns="0" bIns="0" rtlCol="0" anchor="t">
-            <a:normAutofit/>
-          </a:bodyPr>
-          <a:lstStyle/>
-          <a:p>
-            <a:pPr marL="228600" indent="-228600">
+          <a:bodyPr wrap="square" lIns="0" tIns="0" rIns="0" bIns="0" rtlCol="0" anchor="t"/>
+          <a:lstStyle/>
+          <a:p>
+            <a:pPr marL="304800" indent="-304800">
+              <a:spcAft>
+                <a:spcPts val="800"/>
+              </a:spcAft>
+              <a:buSzPct val="100000"/>
+              <a:buChar char="•"/>
+            </a:pPr>
+            <a:r>
+              <a:rPr lang="en-US" sz="1600" dirty="0">
+                <a:solidFill>
+                  <a:srgbClr val="141B26"/>
+                </a:solidFill>
+              </a:rPr>
+              <a:t>30 cm ruler</a:t>
+            </a:r>
+            <a:endParaRPr lang="en-US" sz="1600" dirty="0"/>
+          </a:p>
+          <a:p>
+            <a:pPr marL="304800" indent="-304800">
+              <a:spcAft>
+                <a:spcPts val="800"/>
+              </a:spcAft>
+              <a:buSzPct val="100000"/>
+              <a:buChar char="•"/>
+            </a:pPr>
+            <a:r>
+              <a:rPr lang="en-US" sz="1600" dirty="0">
+                <a:solidFill>
+                  <a:srgbClr val="141B26"/>
+                </a:solidFill>
+              </a:rPr>
+              <a:t>the class table on the board</a:t>
+            </a:r>
+            <a:endParaRPr lang="en-US" sz="1600" dirty="0"/>
+          </a:p>
+          <a:p>
+            <a:pPr marL="304800" indent="-304800">
+              <a:spcAft>
+                <a:spcPts val="800"/>
+              </a:spcAft>
+              <a:buSzPct val="100000"/>
+              <a:buChar char="•"/>
+            </a:pPr>
+            <a:r>
+              <a:rPr lang="en-US" sz="1600" dirty="0">
+                <a:solidFill>
+                  <a:srgbClr val="141B26"/>
+                </a:solidFill>
+              </a:rPr>
+              <a:t>Stretch 2 on your worksheet</a:t>
+            </a:r>
+            <a:endParaRPr lang="en-US" sz="1600" dirty="0"/>
+          </a:p>
+        </p:txBody>
+      </p:sp>
+      <p:sp>
+        <p:nvSpPr>
+          <p:cNvPr id="8" name="Text 6"/>
+          <p:cNvSpPr txBox="1"/>
+          <p:nvPr/>
+        </p:nvSpPr>
+        <p:spPr>
+          <a:xfrm>
+            <a:off x="4937760" y="1828800"/>
+            <a:ext cx="6675120" cy="365760"/>
+          </a:xfrm>
+          <a:prstGeom prst="rect">
+            <a:avLst/>
+          </a:prstGeom>
+          <a:noFill/>
+          <a:ln/>
+        </p:spPr>
+        <p:txBody>
+          <a:bodyPr wrap="square" lIns="0" tIns="0" rIns="0" bIns="0" rtlCol="0" anchor="ctr"/>
+          <a:lstStyle/>
+          <a:p>
+            <a:pPr indent="0" marL="0">
+              <a:buNone/>
+            </a:pPr>
+            <a:r>
+              <a:rPr lang="en-US" sz="1800" b="1" dirty="0">
+                <a:solidFill>
+                  <a:srgbClr val="0F2A5F"/>
+                </a:solidFill>
+              </a:rPr>
+              <a:t>Method</a:t>
+            </a:r>
+            <a:endParaRPr lang="en-US" sz="1800" dirty="0"/>
+          </a:p>
+        </p:txBody>
+      </p:sp>
+      <p:sp>
+        <p:nvSpPr>
+          <p:cNvPr id="9" name="Text 7"/>
+          <p:cNvSpPr txBox="1"/>
+          <p:nvPr/>
+        </p:nvSpPr>
+        <p:spPr>
+          <a:xfrm>
+            <a:off x="4937760" y="2240280"/>
+            <a:ext cx="6675120" cy="3200400"/>
+          </a:xfrm>
+          <a:prstGeom prst="rect">
+            <a:avLst/>
+          </a:prstGeom>
+          <a:noFill/>
+          <a:ln/>
+        </p:spPr>
+        <p:txBody>
+          <a:bodyPr wrap="square" lIns="0" tIns="0" rIns="0" bIns="0" rtlCol="0" anchor="t"/>
+          <a:lstStyle/>
+          <a:p>
+            <a:pPr marL="342900" indent="-342900">
               <a:spcAft>
                 <a:spcPts val="600"/>
               </a:spcAft>
               <a:buSzPct val="100000"/>
-              <a:buChar char="•"/>
-            </a:pPr>
-            <a:r>
-              <a:rPr lang="en-US" sz="1300" dirty="0">
+              <a:buFont typeface="+mj-lt"/>
+              <a:buAutoNum type="arabicPeriod" startAt="1"/>
+            </a:pPr>
+            <a:r>
+              <a:rPr lang="en-US" sz="1600" dirty="0">
                 <a:solidFill>
                   <a:srgbClr val="141B26"/>
                 </a:solidFill>
               </a:rPr>
-              <a:t>30 cm ruler</a:t>
-            </a:r>
-            <a:endParaRPr lang="en-US" sz="1300" dirty="0"/>
-          </a:p>
-          <a:p>
-            <a:pPr marL="228600" indent="-228600">
+              <a:t>Spread one hand flat on the desk. Measure from the tip of the thumb to the tip of the little finger in cm, to one decimal place.</a:t>
+            </a:r>
+            <a:endParaRPr lang="en-US" sz="1600" dirty="0"/>
+          </a:p>
+          <a:p>
+            <a:pPr marL="342900" indent="-342900">
               <a:spcAft>
                 <a:spcPts val="600"/>
               </a:spcAft>
               <a:buSzPct val="100000"/>
-              <a:buChar char="•"/>
-            </a:pPr>
-            <a:r>
-              <a:rPr lang="en-US" sz="1300" dirty="0">
+              <a:buFont typeface="+mj-lt"/>
+              <a:buAutoNum type="arabicPeriod" startAt="1"/>
+            </a:pPr>
+            <a:r>
+              <a:rPr lang="en-US" sz="1600" dirty="0">
                 <a:solidFill>
                   <a:srgbClr val="141B26"/>
                 </a:solidFill>
               </a:rPr>
-              <a:t>the class table on the board</a:t>
-            </a:r>
-            <a:endParaRPr lang="en-US" sz="1300" dirty="0"/>
-          </a:p>
-          <a:p>
-            <a:pPr marL="228600" indent="-228600">
+              <a:t>Write your value on the board.</a:t>
+            </a:r>
+            <a:endParaRPr lang="en-US" sz="1600" dirty="0"/>
+          </a:p>
+          <a:p>
+            <a:pPr marL="342900" indent="-342900">
               <a:spcAft>
                 <a:spcPts val="600"/>
               </a:spcAft>
               <a:buSzPct val="100000"/>
-              <a:buChar char="•"/>
-            </a:pPr>
-            <a:r>
-              <a:rPr lang="en-US" sz="1300" dirty="0">
+              <a:buFont typeface="+mj-lt"/>
+              <a:buAutoNum type="arabicPeriod" startAt="1"/>
+            </a:pPr>
+            <a:r>
+              <a:rPr lang="en-US" sz="1600" dirty="0">
                 <a:solidFill>
                   <a:srgbClr val="141B26"/>
                 </a:solidFill>
               </a:rPr>
-              <a:t>Stretch 2 on your worksheet</a:t>
-            </a:r>
-            <a:endParaRPr lang="en-US" sz="1300" dirty="0"/>
-          </a:p>
-        </p:txBody>
-      </p:sp>
-      <p:sp>
-        <p:nvSpPr>
-          <p:cNvPr id="8" name="Text 6"/>
-          <p:cNvSpPr txBox="1"/>
-          <p:nvPr/>
-        </p:nvSpPr>
-        <p:spPr>
-          <a:xfrm>
-            <a:off x="4937760" y="1828800"/>
-            <a:ext cx="6675120" cy="365760"/>
-          </a:xfrm>
-          <a:prstGeom prst="rect">
-            <a:avLst/>
-          </a:prstGeom>
-          <a:noFill/>
-          <a:ln/>
-        </p:spPr>
-        <p:txBody>
-          <a:bodyPr wrap="square" lIns="0" tIns="0" rIns="0" bIns="0" rtlCol="0" anchor="ctr"/>
-          <a:lstStyle/>
-          <a:p>
-            <a:pPr indent="0" marL="0">
-              <a:buNone/>
-            </a:pPr>
-            <a:r>
-              <a:rPr lang="en-US" sz="1600" b="1" dirty="0">
-                <a:solidFill>
-                  <a:srgbClr val="0F2A5F"/>
-                </a:solidFill>
-              </a:rPr>
-              <a:t>Method</a:t>
+              <a:t>Copy the class values on to your worksheet in order, smallest first.</a:t>
             </a:r>
             <a:endParaRPr lang="en-US" sz="1600" dirty="0"/>
           </a:p>
-        </p:txBody>
-      </p:sp>
-      <p:sp>
-        <p:nvSpPr>
-          <p:cNvPr id="9" name="Text 7"/>
-          <p:cNvSpPr txBox="1"/>
-          <p:nvPr/>
-        </p:nvSpPr>
-        <p:spPr>
-          <a:xfrm>
-            <a:off x="4937760" y="2240280"/>
-            <a:ext cx="6675120" cy="3200400"/>
-          </a:xfrm>
-          <a:prstGeom prst="rect">
-            <a:avLst/>
-          </a:prstGeom>
-          <a:noFill/>
-          <a:ln/>
-        </p:spPr>
-        <p:txBody>
-          <a:bodyPr wrap="square" lIns="0" tIns="0" rIns="0" bIns="0" rtlCol="0" anchor="t">
-            <a:normAutofit/>
-          </a:bodyPr>
-          <a:lstStyle/>
           <a:p>
             <a:pPr marL="342900" indent="-342900">
               <a:spcAft>
-                <a:spcPts val="500"/>
+                <a:spcPts val="600"/>
               </a:spcAft>
               <a:buSzPct val="100000"/>
               <a:buFont typeface="+mj-lt"/>
               <a:buAutoNum type="arabicPeriod" startAt="1"/>
             </a:pPr>
             <a:r>
-              <a:rPr lang="en-US" sz="1300" dirty="0">
+              <a:rPr lang="en-US" sz="1600" dirty="0">
                 <a:solidFill>
                   <a:srgbClr val="141B26"/>
                 </a:solidFill>
               </a:rPr>
-              <a:t>Spread one hand flat on the desk. Measure from the tip of the thumb to the tip of the little finger in cm, to one decimal place.</a:t>
-            </a:r>
-            <a:endParaRPr lang="en-US" sz="1300" dirty="0"/>
+              <a:t>Find the median, then the lower and upper quartiles.</a:t>
+            </a:r>
+            <a:endParaRPr lang="en-US" sz="1600" dirty="0"/>
           </a:p>
           <a:p>
             <a:pPr marL="342900" indent="-342900">
               <a:spcAft>
-                <a:spcPts val="500"/>
+                <a:spcPts val="600"/>
               </a:spcAft>
               <a:buSzPct val="100000"/>
               <a:buFont typeface="+mj-lt"/>
               <a:buAutoNum type="arabicPeriod" startAt="1"/>
             </a:pPr>
             <a:r>
-              <a:rPr lang="en-US" sz="1300" dirty="0">
+              <a:rPr lang="en-US" sz="1600" dirty="0">
                 <a:solidFill>
                   <a:srgbClr val="141B26"/>
                 </a:solidFill>
               </a:rPr>
-              <a:t>Write your value on the board.</a:t>
-            </a:r>
-            <a:endParaRPr lang="en-US" sz="1300" dirty="0"/>
-          </a:p>
-          <a:p>
-            <a:pPr marL="342900" indent="-342900">
-              <a:spcAft>
-                <a:spcPts val="500"/>
-              </a:spcAft>
-              <a:buSzPct val="100000"/>
-              <a:buFont typeface="+mj-lt"/>
-              <a:buAutoNum type="arabicPeriod" startAt="1"/>
-            </a:pPr>
-            <a:r>
-              <a:rPr lang="en-US" sz="1300" dirty="0">
-                <a:solidFill>
-                  <a:srgbClr val="141B26"/>
-                </a:solidFill>
-              </a:rPr>
-              <a:t>Copy the class values on to your worksheet in order, smallest first.</a:t>
-            </a:r>
-            <a:endParaRPr lang="en-US" sz="1300" dirty="0"/>
-          </a:p>
-          <a:p>
-            <a:pPr marL="342900" indent="-342900">
-              <a:spcAft>
-                <a:spcPts val="500"/>
-              </a:spcAft>
-              <a:buSzPct val="100000"/>
-              <a:buFont typeface="+mj-lt"/>
-              <a:buAutoNum type="arabicPeriod" startAt="1"/>
-            </a:pPr>
-            <a:r>
-              <a:rPr lang="en-US" sz="1300" dirty="0">
-                <a:solidFill>
-                  <a:srgbClr val="141B26"/>
-                </a:solidFill>
-              </a:rPr>
-              <a:t>Find the median, then the lower and upper quartiles.</a:t>
-            </a:r>
-            <a:endParaRPr lang="en-US" sz="1300" dirty="0"/>
-          </a:p>
-          <a:p>
-            <a:pPr marL="342900" indent="-342900">
-              <a:spcAft>
-                <a:spcPts val="500"/>
-              </a:spcAft>
-              <a:buSzPct val="100000"/>
-              <a:buFont typeface="+mj-lt"/>
-              <a:buAutoNum type="arabicPeriod" startAt="1"/>
-            </a:pPr>
-            <a:r>
-              <a:rPr lang="en-US" sz="1300" dirty="0">
-                <a:solidFill>
-                  <a:srgbClr val="141B26"/>
-                </a:solidFill>
-              </a:rPr>
               <a:t>Calculate the interquartile range. Is the class data roughly a normal distribution?</a:t>
             </a:r>
-            <a:endParaRPr lang="en-US" sz="1300" dirty="0"/>
+            <a:endParaRPr lang="en-US" sz="1600" dirty="0"/>
           </a:p>
         </p:txBody>
       </p:sp>
@@ -4256,16 +4252,14 @@
           <a:ln/>
         </p:spPr>
         <p:txBody>
-          <a:bodyPr wrap="square" lIns="0" tIns="0" rIns="0" bIns="0" rtlCol="0" anchor="ctr">
-            <a:normAutofit/>
-          </a:bodyPr>
+          <a:bodyPr wrap="square" lIns="0" tIns="0" rIns="0" bIns="0" rtlCol="0" anchor="ctr"/>
           <a:lstStyle/>
           <a:p>
             <a:pPr indent="0" marL="0">
               <a:buNone/>
             </a:pPr>
             <a:r>
-              <a:rPr lang="en-US" sz="1300" b="1" dirty="0">
+              <a:rPr lang="en-US" sz="1500" b="1" dirty="0">
                 <a:solidFill>
                   <a:srgbClr val="3A2E00"/>
                 </a:solidFill>
@@ -4276,14 +4270,14 @@
               <a:buNone/>
             </a:pPr>
             <a:r>
-              <a:rPr lang="en-US" sz="1300" dirty="0">
+              <a:rPr lang="en-US" sz="1500" dirty="0">
                 <a:solidFill>
                   <a:srgbClr val="3A2E00"/>
                 </a:solidFill>
               </a:rPr>
               <a:t>No hazards. Measure gently; do not stretch the hand.</a:t>
             </a:r>
-            <a:endParaRPr lang="en-US" sz="1300" dirty="0"/>
+            <a:endParaRPr lang="en-US" sz="1500" dirty="0"/>
           </a:p>
         </p:txBody>
       </p:sp>
@@ -4476,23 +4470,21 @@
           <a:ln/>
         </p:spPr>
         <p:txBody>
-          <a:bodyPr wrap="square" lIns="0" tIns="0" rIns="0" bIns="0" rtlCol="0" anchor="t">
-            <a:normAutofit/>
-          </a:bodyPr>
+          <a:bodyPr wrap="square" lIns="0" tIns="0" rIns="0" bIns="0" rtlCol="0" anchor="t"/>
           <a:lstStyle/>
           <a:p>
             <a:pPr indent="0" marL="0">
               <a:buNone/>
             </a:pPr>
             <a:r>
-              <a:rPr lang="en-US" sz="2200" b="1" dirty="0">
+              <a:rPr lang="en-US" sz="2600" b="1" dirty="0">
                 <a:solidFill>
                   <a:srgbClr val="0F2A5F"/>
                 </a:solidFill>
               </a:rPr>
               <a:t>'Statins are a new wonder drug' and 'Statins in new health scare' both describe the same trial. Using the quartile results, which headline is fairer? Could both be true?</a:t>
             </a:r>
-            <a:endParaRPr lang="en-US" sz="2200" dirty="0"/>
+            <a:endParaRPr lang="en-US" sz="2600" dirty="0"/>
           </a:p>
         </p:txBody>
       </p:sp>
@@ -4541,9 +4533,7 @@
           <a:ln/>
         </p:spPr>
         <p:txBody>
-          <a:bodyPr wrap="square" lIns="0" tIns="0" rIns="0" bIns="0" rtlCol="0" anchor="t">
-            <a:normAutofit/>
-          </a:bodyPr>
+          <a:bodyPr wrap="square" lIns="0" tIns="0" rIns="0" bIns="0" rtlCol="0" anchor="t"/>
           <a:lstStyle/>
           <a:p>
             <a:pPr indent="0" marL="0">
@@ -4553,14 +4543,14 @@
               <a:buNone/>
             </a:pPr>
             <a:r>
-              <a:rPr lang="en-US" sz="1500" b="1" dirty="0">
+              <a:rPr lang="en-US" sz="1800" b="1" dirty="0">
                 <a:solidFill>
                   <a:srgbClr val="7B3A8E"/>
                 </a:solidFill>
               </a:rPr>
               <a:t>Sentence frames</a:t>
             </a:r>
-            <a:endParaRPr lang="en-US" sz="1500" dirty="0"/>
+            <a:endParaRPr lang="en-US" sz="1800" dirty="0"/>
           </a:p>
           <a:p>
             <a:pPr indent="0" marL="0">
@@ -4570,14 +4560,14 @@
               <a:buNone/>
             </a:pPr>
             <a:r>
-              <a:rPr lang="en-US" sz="1500" dirty="0">
+              <a:rPr lang="en-US" sz="1800" dirty="0">
                 <a:solidFill>
                   <a:srgbClr val="141B26"/>
                 </a:solidFill>
               </a:rPr>
               <a:t>The results show that for ___ of the patients the risk ___.</a:t>
             </a:r>
-            <a:endParaRPr lang="en-US" sz="1500" dirty="0"/>
+            <a:endParaRPr lang="en-US" sz="1800" dirty="0"/>
           </a:p>
           <a:p>
             <a:pPr indent="0" marL="0">
@@ -4587,14 +4577,14 @@
               <a:buNone/>
             </a:pPr>
             <a:r>
-              <a:rPr lang="en-US" sz="1500" dirty="0">
+              <a:rPr lang="en-US" sz="1800" dirty="0">
                 <a:solidFill>
                   <a:srgbClr val="141B26"/>
                 </a:solidFill>
               </a:rPr>
               <a:t>The headline '___' is fairer because ___.</a:t>
             </a:r>
-            <a:endParaRPr lang="en-US" sz="1500" dirty="0"/>
+            <a:endParaRPr lang="en-US" sz="1800" dirty="0"/>
           </a:p>
           <a:p>
             <a:pPr indent="0" marL="0">
@@ -4604,14 +4594,14 @@
               <a:buNone/>
             </a:pPr>
             <a:r>
-              <a:rPr lang="en-US" sz="1500" dirty="0">
+              <a:rPr lang="en-US" sz="1800" dirty="0">
                 <a:solidFill>
                   <a:srgbClr val="141B26"/>
                 </a:solidFill>
               </a:rPr>
               <a:t>Both could be partly true because ___.</a:t>
             </a:r>
-            <a:endParaRPr lang="en-US" sz="1500" dirty="0"/>
+            <a:endParaRPr lang="en-US" sz="1800" dirty="0"/>
           </a:p>
         </p:txBody>
       </p:sp>
@@ -4811,14 +4801,14 @@
               <a:buNone/>
             </a:pPr>
             <a:r>
-              <a:rPr lang="en-US" sz="1400" i="1" dirty="0">
+              <a:rPr lang="en-US" sz="1600" i="1" dirty="0">
                 <a:solidFill>
                   <a:srgbClr val="5B6574"/>
                 </a:solidFill>
               </a:rPr>
               <a:t>On your worksheet exit ticket. Work alone. Hand it in as you leave.</a:t>
             </a:r>
-            <a:endParaRPr lang="en-US" sz="1400" dirty="0"/>
+            <a:endParaRPr lang="en-US" sz="1600" dirty="0"/>
           </a:p>
         </p:txBody>
       </p:sp>
@@ -4831,7 +4821,7 @@
         <p:spPr>
           <a:xfrm>
             <a:off x="548640" y="1828800"/>
-            <a:ext cx="10881360" cy="1188720"/>
+            <a:ext cx="9692640" cy="1188720"/>
           </a:xfrm>
           <a:prstGeom prst="rect">
             <a:avLst/>
@@ -4840,16 +4830,14 @@
           <a:ln/>
         </p:spPr>
         <p:txBody>
-          <a:bodyPr wrap="square" lIns="0" tIns="0" rIns="0" bIns="0" rtlCol="0" anchor="t">
-            <a:normAutofit/>
-          </a:bodyPr>
+          <a:bodyPr wrap="square" lIns="0" tIns="0" rIns="0" bIns="0" rtlCol="0" anchor="t"/>
           <a:lstStyle/>
           <a:p>
             <a:pPr indent="0" marL="0">
               <a:buNone/>
             </a:pPr>
             <a:r>
-              <a:rPr lang="en-US" sz="1800" b="1" dirty="0">
+              <a:rPr lang="en-US" sz="2200" b="1" dirty="0">
                 <a:solidFill>
                   <a:srgbClr val="7B3A8E"/>
                 </a:solidFill>
@@ -4860,14 +4848,14 @@
               <a:buNone/>
             </a:pPr>
             <a:r>
-              <a:rPr lang="en-US" sz="1800" dirty="0">
+              <a:rPr lang="en-US" sz="2200" dirty="0">
                 <a:solidFill>
                   <a:srgbClr val="141B26"/>
                 </a:solidFill>
               </a:rPr>
               <a:t>Write these values in order and give the median: 12, 5, 9, 20, 7.</a:t>
             </a:r>
-            <a:endParaRPr lang="en-US" sz="1800" dirty="0"/>
+            <a:endParaRPr lang="en-US" sz="2200" dirty="0"/>
           </a:p>
         </p:txBody>
       </p:sp>
@@ -4880,7 +4868,7 @@
         <p:spPr>
           <a:xfrm>
             <a:off x="548640" y="3017520"/>
-            <a:ext cx="10881360" cy="1188720"/>
+            <a:ext cx="9692640" cy="1188720"/>
           </a:xfrm>
           <a:prstGeom prst="rect">
             <a:avLst/>
@@ -4889,16 +4877,14 @@
           <a:ln/>
         </p:spPr>
         <p:txBody>
-          <a:bodyPr wrap="square" lIns="0" tIns="0" rIns="0" bIns="0" rtlCol="0" anchor="t">
-            <a:normAutofit/>
-          </a:bodyPr>
+          <a:bodyPr wrap="square" lIns="0" tIns="0" rIns="0" bIns="0" rtlCol="0" anchor="t"/>
           <a:lstStyle/>
           <a:p>
             <a:pPr indent="0" marL="0">
               <a:buNone/>
             </a:pPr>
             <a:r>
-              <a:rPr lang="en-US" sz="1800" b="1" dirty="0">
+              <a:rPr lang="en-US" sz="2200" b="1" dirty="0">
                 <a:solidFill>
                   <a:srgbClr val="7B3A8E"/>
                 </a:solidFill>
@@ -4909,14 +4895,14 @@
               <a:buNone/>
             </a:pPr>
             <a:r>
-              <a:rPr lang="en-US" sz="1800" dirty="0">
+              <a:rPr lang="en-US" sz="2200" dirty="0">
                 <a:solidFill>
                   <a:srgbClr val="141B26"/>
                 </a:solidFill>
               </a:rPr>
               <a:t>The upper quartile is 30 and the lower quartile is 18. Calculate the interquartile range.</a:t>
             </a:r>
-            <a:endParaRPr lang="en-US" sz="1800" dirty="0"/>
+            <a:endParaRPr lang="en-US" sz="2200" dirty="0"/>
           </a:p>
         </p:txBody>
       </p:sp>
@@ -4929,7 +4915,7 @@
         <p:spPr>
           <a:xfrm>
             <a:off x="548640" y="4206240"/>
-            <a:ext cx="10881360" cy="1188720"/>
+            <a:ext cx="9692640" cy="1188720"/>
           </a:xfrm>
           <a:prstGeom prst="rect">
             <a:avLst/>
@@ -4938,16 +4924,14 @@
           <a:ln/>
         </p:spPr>
         <p:txBody>
-          <a:bodyPr wrap="square" lIns="0" tIns="0" rIns="0" bIns="0" rtlCol="0" anchor="t">
-            <a:normAutofit/>
-          </a:bodyPr>
+          <a:bodyPr wrap="square" lIns="0" tIns="0" rIns="0" bIns="0" rtlCol="0" anchor="t"/>
           <a:lstStyle/>
           <a:p>
             <a:pPr indent="0" marL="0">
               <a:buNone/>
             </a:pPr>
             <a:r>
-              <a:rPr lang="en-US" sz="1800" b="1" dirty="0">
+              <a:rPr lang="en-US" sz="2200" b="1" dirty="0">
                 <a:solidFill>
                   <a:srgbClr val="7B3A8E"/>
                 </a:solidFill>
@@ -4958,14 +4942,14 @@
               <a:buNone/>
             </a:pPr>
             <a:r>
-              <a:rPr lang="en-US" sz="1800" dirty="0">
+              <a:rPr lang="en-US" sz="2200" dirty="0">
                 <a:solidFill>
                   <a:srgbClr val="141B26"/>
                 </a:solidFill>
               </a:rPr>
               <a:t>What does a small interquartile range tell you about a population?</a:t>
             </a:r>
-            <a:endParaRPr lang="en-US" sz="1800" dirty="0"/>
+            <a:endParaRPr lang="en-US" sz="2200" dirty="0"/>
           </a:p>
         </p:txBody>
       </p:sp>
@@ -5224,7 +5208,7 @@
         <p:spPr>
           <a:xfrm>
             <a:off x="548640" y="1371600"/>
-            <a:ext cx="10881360" cy="4480560"/>
+            <a:ext cx="10881360" cy="4114800"/>
           </a:xfrm>
           <a:prstGeom prst="rect">
             <a:avLst/>
@@ -5233,81 +5217,79 @@
           <a:ln/>
         </p:spPr>
         <p:txBody>
-          <a:bodyPr wrap="square" lIns="0" tIns="0" rIns="0" bIns="0" rtlCol="0" anchor="t">
-            <a:normAutofit/>
-          </a:bodyPr>
+          <a:bodyPr wrap="square" lIns="0" tIns="0" rIns="0" bIns="0" rtlCol="0" anchor="t"/>
           <a:lstStyle/>
           <a:p>
             <a:pPr marL="342900" indent="-342900">
               <a:spcAft>
-                <a:spcPts val="1000"/>
+                <a:spcPts val="1200"/>
               </a:spcAft>
               <a:buSzPct val="100000"/>
               <a:buChar char="✓"/>
             </a:pPr>
             <a:r>
-              <a:rPr lang="en-US" sz="1700" dirty="0">
+              <a:rPr lang="en-US" sz="2000" dirty="0">
                 <a:solidFill>
                   <a:srgbClr val="141B26"/>
                 </a:solidFill>
               </a:rPr>
               <a:t>Order the values first. The median is the middle value.</a:t>
             </a:r>
-            <a:endParaRPr lang="en-US" sz="1700" dirty="0"/>
+            <a:endParaRPr lang="en-US" sz="2000" dirty="0"/>
           </a:p>
           <a:p>
             <a:pPr marL="342900" indent="-342900">
               <a:spcAft>
-                <a:spcPts val="1000"/>
+                <a:spcPts val="1200"/>
               </a:spcAft>
               <a:buSzPct val="100000"/>
               <a:buChar char="✓"/>
             </a:pPr>
             <a:r>
-              <a:rPr lang="en-US" sz="1700" dirty="0">
+              <a:rPr lang="en-US" sz="2000" dirty="0">
                 <a:solidFill>
                   <a:srgbClr val="141B26"/>
                 </a:solidFill>
               </a:rPr>
               <a:t>Quartiles are one quarter and three quarters of the way through; interquartile range = UQ minus LQ.</a:t>
             </a:r>
-            <a:endParaRPr lang="en-US" sz="1700" dirty="0"/>
+            <a:endParaRPr lang="en-US" sz="2000" dirty="0"/>
           </a:p>
           <a:p>
             <a:pPr marL="342900" indent="-342900">
               <a:spcAft>
-                <a:spcPts val="1000"/>
+                <a:spcPts val="1200"/>
               </a:spcAft>
               <a:buSzPct val="100000"/>
               <a:buChar char="✓"/>
             </a:pPr>
             <a:r>
-              <a:rPr lang="en-US" sz="1700" dirty="0">
+              <a:rPr lang="en-US" sz="2000" dirty="0">
                 <a:solidFill>
                   <a:srgbClr val="141B26"/>
                 </a:solidFill>
               </a:rPr>
               <a:t>The interquartile range measures the variation in the middle 50% and ignores extreme values.</a:t>
             </a:r>
-            <a:endParaRPr lang="en-US" sz="1700" dirty="0"/>
+            <a:endParaRPr lang="en-US" sz="2000" dirty="0"/>
           </a:p>
           <a:p>
             <a:pPr marL="342900" indent="-342900">
               <a:spcAft>
-                <a:spcPts val="1000"/>
+                <a:spcPts val="1200"/>
               </a:spcAft>
               <a:buSzPct val="100000"/>
               <a:buChar char="✓"/>
             </a:pPr>
             <a:r>
-              <a:rPr lang="en-US" sz="1700" dirty="0">
+              <a:rPr lang="en-US" sz="2000" dirty="0">
                 <a:solidFill>
                   <a:srgbClr val="141B26"/>
                 </a:solidFill>
               </a:rPr>
               <a:t>Splitting trial data into quartiles shows who a medicine helps and who it does not.</a:t>
             </a:r>
-            <a:endParaRPr lang="en-US" sz="1700" dirty="0"/>
+            <a:endParaRPr lang="en-US" sz="2000" dirty="0"/>
           </a:p>
         </p:txBody>
       </p:sp>
@@ -5336,7 +5318,7 @@
               <a:buNone/>
             </a:pPr>
             <a:r>
-              <a:rPr lang="en-US" sz="1300" b="1" dirty="0">
+              <a:rPr lang="en-US" sz="1500" b="1" dirty="0">
                 <a:solidFill>
                   <a:srgbClr val="7B3A8E"/>
                 </a:solidFill>
@@ -5347,14 +5329,14 @@
               <a:buNone/>
             </a:pPr>
             <a:r>
-              <a:rPr lang="en-US" sz="1300" dirty="0">
+              <a:rPr lang="en-US" sz="1500" dirty="0">
                 <a:solidFill>
                   <a:srgbClr val="141B26"/>
                 </a:solidFill>
               </a:rPr>
               <a:t>Ecology: how scientists estimate how many organisms live in an area, and how they are spread out.</a:t>
             </a:r>
-            <a:endParaRPr lang="en-US" sz="1300" dirty="0"/>
+            <a:endParaRPr lang="en-US" sz="1500" dirty="0"/>
           </a:p>
         </p:txBody>
       </p:sp>
@@ -5622,77 +5604,75 @@
           <a:ln/>
         </p:spPr>
         <p:txBody>
-          <a:bodyPr wrap="square" lIns="0" tIns="0" rIns="0" bIns="0" rtlCol="0" anchor="t">
-            <a:normAutofit/>
-          </a:bodyPr>
+          <a:bodyPr wrap="square" lIns="0" tIns="0" rIns="0" bIns="0" rtlCol="0" anchor="t"/>
           <a:lstStyle/>
           <a:p>
             <a:pPr indent="0" marL="0">
               <a:spcAft>
-                <a:spcPts val="1000"/>
+                <a:spcPts val="1200"/>
               </a:spcAft>
               <a:buNone/>
             </a:pPr>
             <a:r>
-              <a:rPr lang="en-US" sz="2000" dirty="0">
+              <a:rPr lang="en-US" sz="2400" dirty="0">
                 <a:solidFill>
                   <a:srgbClr val="141B26"/>
                 </a:solidFill>
               </a:rPr>
               <a:t>Resting pulse rates (beats per minute) of nine students: 72, 65, 80, 58, 90, 66, 75, 61, 70.</a:t>
             </a:r>
-            <a:endParaRPr lang="en-US" sz="2000" dirty="0"/>
+            <a:endParaRPr lang="en-US" sz="2400" dirty="0"/>
           </a:p>
           <a:p>
             <a:pPr indent="0" marL="0">
               <a:spcAft>
-                <a:spcPts val="1000"/>
+                <a:spcPts val="1200"/>
               </a:spcAft>
               <a:buNone/>
             </a:pPr>
             <a:r>
-              <a:rPr lang="en-US" sz="2000" dirty="0">
+              <a:rPr lang="en-US" sz="2400" dirty="0">
                 <a:solidFill>
                   <a:srgbClr val="141B26"/>
                 </a:solidFill>
               </a:rPr>
               <a:t>1. Write the values in order, smallest first.</a:t>
             </a:r>
-            <a:endParaRPr lang="en-US" sz="2000" dirty="0"/>
+            <a:endParaRPr lang="en-US" sz="2400" dirty="0"/>
           </a:p>
           <a:p>
             <a:pPr indent="0" marL="0">
               <a:spcAft>
-                <a:spcPts val="1000"/>
+                <a:spcPts val="1200"/>
               </a:spcAft>
               <a:buNone/>
             </a:pPr>
             <a:r>
-              <a:rPr lang="en-US" sz="2000" dirty="0">
+              <a:rPr lang="en-US" sz="2400" dirty="0">
                 <a:solidFill>
                   <a:srgbClr val="141B26"/>
                 </a:solidFill>
               </a:rPr>
               <a:t>2. Which value is in the middle?</a:t>
             </a:r>
-            <a:endParaRPr lang="en-US" sz="2000" dirty="0"/>
+            <a:endParaRPr lang="en-US" sz="2400" dirty="0"/>
           </a:p>
           <a:p>
             <a:pPr indent="0" marL="0">
               <a:spcAft>
-                <a:spcPts val="1000"/>
+                <a:spcPts val="1200"/>
               </a:spcAft>
               <a:buNone/>
             </a:pPr>
             <a:r>
-              <a:rPr lang="en-US" sz="2000" dirty="0">
+              <a:rPr lang="en-US" sz="2400" dirty="0">
                 <a:solidFill>
                   <a:srgbClr val="141B26"/>
                 </a:solidFill>
               </a:rPr>
               <a:t>3. Calculate the range (largest minus smallest).</a:t>
             </a:r>
-            <a:endParaRPr lang="en-US" sz="2000" dirty="0"/>
+            <a:endParaRPr lang="en-US" sz="2400" dirty="0"/>
           </a:p>
         </p:txBody>
       </p:sp>
@@ -5875,8 +5855,8 @@
         </p:nvSpPr>
         <p:spPr>
           <a:xfrm>
-            <a:off x="548640" y="1325880"/>
-            <a:ext cx="5669280" cy="457200"/>
+            <a:off x="548640" y="1280160"/>
+            <a:ext cx="5486400" cy="411480"/>
           </a:xfrm>
           <a:prstGeom prst="rect">
             <a:avLst/>
@@ -5892,14 +5872,14 @@
               <a:buNone/>
             </a:pPr>
             <a:r>
-              <a:rPr lang="en-US" sz="2000" b="1" dirty="0">
+              <a:rPr lang="en-US" sz="2200" b="1" dirty="0">
                 <a:solidFill>
                   <a:srgbClr val="7B3A8E"/>
                 </a:solidFill>
               </a:rPr>
               <a:t>Today I can ...</a:t>
             </a:r>
-            <a:endParaRPr lang="en-US" sz="2000" dirty="0"/>
+            <a:endParaRPr lang="en-US" sz="2200" dirty="0"/>
           </a:p>
         </p:txBody>
       </p:sp>
@@ -5911,8 +5891,8 @@
         </p:nvSpPr>
         <p:spPr>
           <a:xfrm>
-            <a:off x="594360" y="1947672"/>
-            <a:ext cx="292608" cy="292608"/>
+            <a:off x="594360" y="1810512"/>
+            <a:ext cx="310896" cy="310896"/>
           </a:xfrm>
           <a:prstGeom prst="rect">
             <a:avLst/>
@@ -5936,8 +5916,8 @@
         </p:nvSpPr>
         <p:spPr>
           <a:xfrm>
-            <a:off x="1051560" y="1874520"/>
-            <a:ext cx="5120640" cy="868680"/>
+            <a:off x="1097280" y="1737360"/>
+            <a:ext cx="10332720" cy="868680"/>
           </a:xfrm>
           <a:prstGeom prst="rect">
             <a:avLst/>
@@ -5946,23 +5926,21 @@
           <a:ln/>
         </p:spPr>
         <p:txBody>
-          <a:bodyPr wrap="square" lIns="0" tIns="0" rIns="0" bIns="0" rtlCol="0" anchor="t">
-            <a:normAutofit/>
-          </a:bodyPr>
+          <a:bodyPr wrap="square" lIns="0" tIns="0" rIns="0" bIns="0" rtlCol="0" anchor="t"/>
           <a:lstStyle/>
           <a:p>
             <a:pPr indent="0" marL="0">
               <a:buNone/>
             </a:pPr>
             <a:r>
-              <a:rPr lang="en-US" sz="1600" dirty="0">
+              <a:rPr lang="en-US" sz="2000" dirty="0">
                 <a:solidFill>
                   <a:srgbClr val="141B26"/>
                 </a:solidFill>
               </a:rPr>
               <a:t>I can find the median, the lower and upper quartiles and the interquartile range of a simple data set.</a:t>
             </a:r>
-            <a:endParaRPr lang="en-US" sz="1600" dirty="0"/>
+            <a:endParaRPr lang="en-US" sz="2000" dirty="0"/>
           </a:p>
         </p:txBody>
       </p:sp>
@@ -5974,8 +5952,8 @@
         </p:nvSpPr>
         <p:spPr>
           <a:xfrm>
-            <a:off x="594360" y="2907792"/>
-            <a:ext cx="292608" cy="292608"/>
+            <a:off x="594360" y="2679192"/>
+            <a:ext cx="310896" cy="310896"/>
           </a:xfrm>
           <a:prstGeom prst="rect">
             <a:avLst/>
@@ -5999,8 +5977,8 @@
         </p:nvSpPr>
         <p:spPr>
           <a:xfrm>
-            <a:off x="1051560" y="2834640"/>
-            <a:ext cx="5120640" cy="868680"/>
+            <a:off x="1097280" y="2606040"/>
+            <a:ext cx="10332720" cy="868680"/>
           </a:xfrm>
           <a:prstGeom prst="rect">
             <a:avLst/>
@@ -6009,23 +5987,21 @@
           <a:ln/>
         </p:spPr>
         <p:txBody>
-          <a:bodyPr wrap="square" lIns="0" tIns="0" rIns="0" bIns="0" rtlCol="0" anchor="t">
-            <a:normAutofit/>
-          </a:bodyPr>
+          <a:bodyPr wrap="square" lIns="0" tIns="0" rIns="0" bIns="0" rtlCol="0" anchor="t"/>
           <a:lstStyle/>
           <a:p>
             <a:pPr indent="0" marL="0">
               <a:buNone/>
             </a:pPr>
             <a:r>
-              <a:rPr lang="en-US" sz="1600" dirty="0">
+              <a:rPr lang="en-US" sz="2000" dirty="0">
                 <a:solidFill>
                   <a:srgbClr val="141B26"/>
                 </a:solidFill>
               </a:rPr>
               <a:t>I can use quartiles to compare the variation in two groups and to interpret the results of a medicine trial.</a:t>
             </a:r>
-            <a:endParaRPr lang="en-US" sz="1600" dirty="0"/>
+            <a:endParaRPr lang="en-US" sz="2000" dirty="0"/>
           </a:p>
         </p:txBody>
       </p:sp>
@@ -6037,8 +6013,8 @@
         </p:nvSpPr>
         <p:spPr>
           <a:xfrm>
-            <a:off x="6583680" y="1325880"/>
-            <a:ext cx="5029200" cy="457200"/>
+            <a:off x="548640" y="3611880"/>
+            <a:ext cx="5486400" cy="411480"/>
           </a:xfrm>
           <a:prstGeom prst="rect">
             <a:avLst/>
@@ -6054,14 +6030,14 @@
               <a:buNone/>
             </a:pPr>
             <a:r>
-              <a:rPr lang="en-US" sz="2000" b="1" dirty="0">
+              <a:rPr lang="en-US" sz="2200" b="1" dirty="0">
                 <a:solidFill>
                   <a:srgbClr val="7B3A8E"/>
                 </a:solidFill>
               </a:rPr>
               <a:t>Key words today</a:t>
             </a:r>
-            <a:endParaRPr lang="en-US" sz="2000" dirty="0"/>
+            <a:endParaRPr lang="en-US" sz="2200" dirty="0"/>
           </a:p>
         </p:txBody>
       </p:sp>
@@ -6073,8 +6049,8 @@
         </p:nvSpPr>
         <p:spPr>
           <a:xfrm>
-            <a:off x="6583680" y="1874520"/>
-            <a:ext cx="5029200" cy="4023360"/>
+            <a:off x="548640" y="4069080"/>
+            <a:ext cx="3515258" cy="1920240"/>
           </a:xfrm>
           <a:prstGeom prst="rect">
             <a:avLst/>
@@ -6083,319 +6059,267 @@
           <a:ln/>
         </p:spPr>
         <p:txBody>
-          <a:bodyPr wrap="square" lIns="0" tIns="0" rIns="0" bIns="0" rtlCol="0" anchor="t">
-            <a:normAutofit/>
-          </a:bodyPr>
+          <a:bodyPr wrap="square" lIns="0" tIns="0" rIns="0" bIns="0" rtlCol="0" anchor="t"/>
+          <a:lstStyle/>
+          <a:p>
+            <a:pPr marL="304800" indent="-304800">
+              <a:spcAft>
+                <a:spcPts val="600"/>
+              </a:spcAft>
+              <a:buSzPct val="100000"/>
+              <a:buChar char="•"/>
+            </a:pPr>
+            <a:r>
+              <a:rPr lang="en-US" sz="2100" b="1" dirty="0">
+                <a:solidFill>
+                  <a:srgbClr val="0F2A5F"/>
+                </a:solidFill>
+              </a:rPr>
+              <a:t>median</a:t>
+            </a:r>
+            <a:endParaRPr lang="en-US" sz="2100" dirty="0"/>
+          </a:p>
+          <a:p>
+            <a:pPr marL="304800" indent="-304800">
+              <a:spcAft>
+                <a:spcPts val="600"/>
+              </a:spcAft>
+              <a:buSzPct val="100000"/>
+              <a:buChar char="•"/>
+            </a:pPr>
+            <a:r>
+              <a:rPr lang="en-US" sz="2100" b="1" dirty="0">
+                <a:solidFill>
+                  <a:srgbClr val="0F2A5F"/>
+                </a:solidFill>
+              </a:rPr>
+              <a:t>mean</a:t>
+            </a:r>
+            <a:endParaRPr lang="en-US" sz="2100" dirty="0"/>
+          </a:p>
+          <a:p>
+            <a:pPr marL="304800" indent="-304800">
+              <a:spcAft>
+                <a:spcPts val="600"/>
+              </a:spcAft>
+              <a:buSzPct val="100000"/>
+              <a:buChar char="•"/>
+            </a:pPr>
+            <a:r>
+              <a:rPr lang="en-US" sz="2100" b="1" dirty="0">
+                <a:solidFill>
+                  <a:srgbClr val="0F2A5F"/>
+                </a:solidFill>
+              </a:rPr>
+              <a:t>range</a:t>
+            </a:r>
+            <a:endParaRPr lang="en-US" sz="2100" dirty="0"/>
+          </a:p>
+          <a:p>
+            <a:pPr marL="304800" indent="-304800">
+              <a:spcAft>
+                <a:spcPts val="600"/>
+              </a:spcAft>
+              <a:buSzPct val="100000"/>
+              <a:buChar char="•"/>
+            </a:pPr>
+            <a:r>
+              <a:rPr lang="en-US" sz="2100" b="1" dirty="0">
+                <a:solidFill>
+                  <a:srgbClr val="0F2A5F"/>
+                </a:solidFill>
+              </a:rPr>
+              <a:t>quartile</a:t>
+            </a:r>
+            <a:endParaRPr lang="en-US" sz="2100" dirty="0"/>
+          </a:p>
+        </p:txBody>
+      </p:sp>
+      <p:sp>
+        <p:nvSpPr>
+          <p:cNvPr id="12" name="Text 10"/>
+          <p:cNvSpPr txBox="1"/>
+          <p:nvPr/>
+        </p:nvSpPr>
+        <p:spPr>
+          <a:xfrm>
+            <a:off x="4338218" y="4069080"/>
+            <a:ext cx="3515258" cy="1920240"/>
+          </a:xfrm>
+          <a:prstGeom prst="rect">
+            <a:avLst/>
+          </a:prstGeom>
+          <a:noFill/>
+          <a:ln/>
+        </p:spPr>
+        <p:txBody>
+          <a:bodyPr wrap="square" lIns="0" tIns="0" rIns="0" bIns="0" rtlCol="0" anchor="t"/>
+          <a:lstStyle/>
+          <a:p>
+            <a:pPr marL="304800" indent="-304800">
+              <a:spcAft>
+                <a:spcPts val="600"/>
+              </a:spcAft>
+              <a:buSzPct val="100000"/>
+              <a:buChar char="•"/>
+            </a:pPr>
+            <a:r>
+              <a:rPr lang="en-US" sz="2100" b="1" dirty="0">
+                <a:solidFill>
+                  <a:srgbClr val="0F2A5F"/>
+                </a:solidFill>
+              </a:rPr>
+              <a:t>lower quartile</a:t>
+            </a:r>
+            <a:endParaRPr lang="en-US" sz="2100" dirty="0"/>
+          </a:p>
+          <a:p>
+            <a:pPr marL="304800" indent="-304800">
+              <a:spcAft>
+                <a:spcPts val="600"/>
+              </a:spcAft>
+              <a:buSzPct val="100000"/>
+              <a:buChar char="•"/>
+            </a:pPr>
+            <a:r>
+              <a:rPr lang="en-US" sz="2100" b="1" dirty="0">
+                <a:solidFill>
+                  <a:srgbClr val="0F2A5F"/>
+                </a:solidFill>
+              </a:rPr>
+              <a:t>upper quartile</a:t>
+            </a:r>
+            <a:endParaRPr lang="en-US" sz="2100" dirty="0"/>
+          </a:p>
+          <a:p>
+            <a:pPr marL="304800" indent="-304800">
+              <a:spcAft>
+                <a:spcPts val="600"/>
+              </a:spcAft>
+              <a:buSzPct val="100000"/>
+              <a:buChar char="•"/>
+            </a:pPr>
+            <a:r>
+              <a:rPr lang="en-US" sz="2100" b="1" dirty="0">
+                <a:solidFill>
+                  <a:srgbClr val="0F2A5F"/>
+                </a:solidFill>
+              </a:rPr>
+              <a:t>interquartile range</a:t>
+            </a:r>
+            <a:endParaRPr lang="en-US" sz="2100" dirty="0"/>
+          </a:p>
+          <a:p>
+            <a:pPr marL="304800" indent="-304800">
+              <a:spcAft>
+                <a:spcPts val="600"/>
+              </a:spcAft>
+              <a:buSzPct val="100000"/>
+              <a:buChar char="•"/>
+            </a:pPr>
+            <a:r>
+              <a:rPr lang="en-US" sz="2100" b="1" dirty="0">
+                <a:solidFill>
+                  <a:srgbClr val="0F2A5F"/>
+                </a:solidFill>
+              </a:rPr>
+              <a:t>normal distribution</a:t>
+            </a:r>
+            <a:endParaRPr lang="en-US" sz="2100" dirty="0"/>
+          </a:p>
+        </p:txBody>
+      </p:sp>
+      <p:sp>
+        <p:nvSpPr>
+          <p:cNvPr id="13" name="Text 11"/>
+          <p:cNvSpPr txBox="1"/>
+          <p:nvPr/>
+        </p:nvSpPr>
+        <p:spPr>
+          <a:xfrm>
+            <a:off x="8127797" y="4069080"/>
+            <a:ext cx="3515258" cy="1920240"/>
+          </a:xfrm>
+          <a:prstGeom prst="rect">
+            <a:avLst/>
+          </a:prstGeom>
+          <a:noFill/>
+          <a:ln/>
+        </p:spPr>
+        <p:txBody>
+          <a:bodyPr wrap="square" lIns="0" tIns="0" rIns="0" bIns="0" rtlCol="0" anchor="t"/>
+          <a:lstStyle/>
+          <a:p>
+            <a:pPr marL="304800" indent="-304800">
+              <a:spcAft>
+                <a:spcPts val="600"/>
+              </a:spcAft>
+              <a:buSzPct val="100000"/>
+              <a:buChar char="•"/>
+            </a:pPr>
+            <a:r>
+              <a:rPr lang="en-US" sz="2200" b="1" dirty="0">
+                <a:solidFill>
+                  <a:srgbClr val="0F2A5F"/>
+                </a:solidFill>
+              </a:rPr>
+              <a:t>continuous variation</a:t>
+            </a:r>
+            <a:endParaRPr lang="en-US" sz="2200" dirty="0"/>
+          </a:p>
+          <a:p>
+            <a:pPr marL="304800" indent="-304800">
+              <a:spcAft>
+                <a:spcPts val="600"/>
+              </a:spcAft>
+              <a:buSzPct val="100000"/>
+              <a:buChar char="•"/>
+            </a:pPr>
+            <a:r>
+              <a:rPr lang="en-US" sz="2200" b="1" dirty="0">
+                <a:solidFill>
+                  <a:srgbClr val="0F2A5F"/>
+                </a:solidFill>
+              </a:rPr>
+              <a:t>clinical trial</a:t>
+            </a:r>
+            <a:endParaRPr lang="en-US" sz="2200" dirty="0"/>
+          </a:p>
+        </p:txBody>
+      </p:sp>
+      <p:sp>
+        <p:nvSpPr>
+          <p:cNvPr id="14" name="Text 12"/>
+          <p:cNvSpPr txBox="1"/>
+          <p:nvPr/>
+        </p:nvSpPr>
+        <p:spPr>
+          <a:xfrm>
+            <a:off x="548640" y="6035040"/>
+            <a:ext cx="10881360" cy="320040"/>
+          </a:xfrm>
+          <a:prstGeom prst="rect">
+            <a:avLst/>
+          </a:prstGeom>
+          <a:noFill/>
+          <a:ln/>
+        </p:spPr>
+        <p:txBody>
+          <a:bodyPr wrap="square" lIns="0" tIns="0" rIns="0" bIns="0" rtlCol="0" anchor="ctr"/>
           <a:lstStyle/>
           <a:p>
             <a:pPr indent="0" marL="0">
-              <a:spcAft>
-                <a:spcPts val="500"/>
-              </a:spcAft>
-              <a:buNone/>
-            </a:pPr>
-            <a:r>
-              <a:rPr lang="en-US" sz="1300" b="1" dirty="0">
-                <a:solidFill>
-                  <a:srgbClr val="0F2A5F"/>
-                </a:solidFill>
-              </a:rPr>
-              <a:t>median</a:t>
-            </a:r>
-            <a:pPr indent="0" marL="0">
-              <a:spcAft>
-                <a:spcPts val="500"/>
-              </a:spcAft>
-              <a:buNone/>
-            </a:pPr>
-            <a:r>
-              <a:rPr lang="en-US" sz="1300" dirty="0">
-                <a:solidFill>
-                  <a:srgbClr val="141B26"/>
-                </a:solidFill>
-              </a:rPr>
-              <a:t>  the middle value when the values are written in order</a:t>
-            </a:r>
-            <a:endParaRPr lang="en-US" sz="1300" dirty="0"/>
-          </a:p>
-          <a:p>
-            <a:pPr indent="0" marL="0">
-              <a:spcAft>
-                <a:spcPts val="500"/>
-              </a:spcAft>
-              <a:buNone/>
-            </a:pPr>
-            <a:r>
-              <a:rPr lang="en-US" sz="1300" b="1" dirty="0">
-                <a:solidFill>
-                  <a:srgbClr val="0F2A5F"/>
-                </a:solidFill>
-              </a:rPr>
-              <a:t>mean</a:t>
-            </a:r>
-            <a:pPr indent="0" marL="0">
-              <a:spcAft>
-                <a:spcPts val="500"/>
-              </a:spcAft>
-              <a:buNone/>
-            </a:pPr>
-            <a:r>
-              <a:rPr lang="en-US" sz="1300" dirty="0">
-                <a:solidFill>
-                  <a:srgbClr val="141B26"/>
-                </a:solidFill>
-              </a:rPr>
-              <a:t>  the total of the values divided by the number of values</a:t>
-            </a:r>
-            <a:endParaRPr lang="en-US" sz="1300" dirty="0"/>
-          </a:p>
-          <a:p>
-            <a:pPr indent="0" marL="0">
-              <a:spcAft>
-                <a:spcPts val="500"/>
-              </a:spcAft>
-              <a:buNone/>
-            </a:pPr>
-            <a:r>
-              <a:rPr lang="en-US" sz="1300" b="1" dirty="0">
-                <a:solidFill>
-                  <a:srgbClr val="0F2A5F"/>
-                </a:solidFill>
-              </a:rPr>
-              <a:t>range</a:t>
-            </a:r>
-            <a:pPr indent="0" marL="0">
-              <a:spcAft>
-                <a:spcPts val="500"/>
-              </a:spcAft>
-              <a:buNone/>
-            </a:pPr>
-            <a:r>
-              <a:rPr lang="en-US" sz="1300" dirty="0">
-                <a:solidFill>
-                  <a:srgbClr val="141B26"/>
-                </a:solidFill>
-              </a:rPr>
-              <a:t>  the largest value minus the smallest value</a:t>
-            </a:r>
-            <a:endParaRPr lang="en-US" sz="1300" dirty="0"/>
-          </a:p>
-          <a:p>
-            <a:pPr indent="0" marL="0">
-              <a:spcAft>
-                <a:spcPts val="500"/>
-              </a:spcAft>
-              <a:buNone/>
-            </a:pPr>
-            <a:r>
-              <a:rPr lang="en-US" sz="1300" b="1" dirty="0">
-                <a:solidFill>
-                  <a:srgbClr val="0F2A5F"/>
-                </a:solidFill>
-              </a:rPr>
-              <a:t>quartile</a:t>
-            </a:r>
-            <a:pPr indent="0" marL="0">
-              <a:spcAft>
-                <a:spcPts val="500"/>
-              </a:spcAft>
-              <a:buNone/>
-            </a:pPr>
-            <a:r>
-              <a:rPr lang="en-US" sz="1300" dirty="0">
-                <a:solidFill>
-                  <a:srgbClr val="141B26"/>
-                </a:solidFill>
-              </a:rPr>
-              <a:t>  a value one quarter or three quarters of the way through the ordered data</a:t>
-            </a:r>
-            <a:endParaRPr lang="en-US" sz="1300" dirty="0"/>
-          </a:p>
-          <a:p>
-            <a:pPr indent="0" marL="0">
-              <a:spcAft>
-                <a:spcPts val="500"/>
-              </a:spcAft>
-              <a:buNone/>
-            </a:pPr>
-            <a:r>
-              <a:rPr lang="en-US" sz="1300" b="1" dirty="0">
-                <a:solidFill>
-                  <a:srgbClr val="0F2A5F"/>
-                </a:solidFill>
-              </a:rPr>
-              <a:t>lower quartile</a:t>
-            </a:r>
-            <a:pPr indent="0" marL="0">
-              <a:spcAft>
-                <a:spcPts val="500"/>
-              </a:spcAft>
-              <a:buNone/>
-            </a:pPr>
-            <a:r>
-              <a:rPr lang="en-US" sz="1300" dirty="0">
-                <a:solidFill>
-                  <a:srgbClr val="141B26"/>
-                </a:solidFill>
-              </a:rPr>
-              <a:t>  the value one quarter of the way through the ordered data (LQ)</a:t>
-            </a:r>
-            <a:endParaRPr lang="en-US" sz="1300" dirty="0"/>
-          </a:p>
-          <a:p>
-            <a:pPr indent="0" marL="0">
-              <a:spcAft>
-                <a:spcPts val="500"/>
-              </a:spcAft>
-              <a:buNone/>
-            </a:pPr>
-            <a:r>
-              <a:rPr lang="en-US" sz="1300" b="1" dirty="0">
-                <a:solidFill>
-                  <a:srgbClr val="0F2A5F"/>
-                </a:solidFill>
-              </a:rPr>
-              <a:t>upper quartile</a:t>
-            </a:r>
-            <a:pPr indent="0" marL="0">
-              <a:spcAft>
-                <a:spcPts val="500"/>
-              </a:spcAft>
-              <a:buNone/>
-            </a:pPr>
-            <a:r>
-              <a:rPr lang="en-US" sz="1300" dirty="0">
-                <a:solidFill>
-                  <a:srgbClr val="141B26"/>
-                </a:solidFill>
-              </a:rPr>
-              <a:t>  the value three quarters of the way through the ordered data (UQ)</a:t>
-            </a:r>
-            <a:endParaRPr lang="en-US" sz="1300" dirty="0"/>
-          </a:p>
-          <a:p>
-            <a:pPr indent="0" marL="0">
-              <a:spcAft>
-                <a:spcPts val="500"/>
-              </a:spcAft>
-              <a:buNone/>
-            </a:pPr>
-            <a:r>
-              <a:rPr lang="en-US" sz="1300" b="1" dirty="0">
-                <a:solidFill>
-                  <a:srgbClr val="0F2A5F"/>
-                </a:solidFill>
-              </a:rPr>
-              <a:t>interquartile range</a:t>
-            </a:r>
-            <a:pPr indent="0" marL="0">
-              <a:spcAft>
-                <a:spcPts val="500"/>
-              </a:spcAft>
-              <a:buNone/>
-            </a:pPr>
-            <a:r>
-              <a:rPr lang="en-US" sz="1300" dirty="0">
-                <a:solidFill>
-                  <a:srgbClr val="141B26"/>
-                </a:solidFill>
-              </a:rPr>
-              <a:t>  UQ minus LQ: the spread of the middle 50% of the data</a:t>
-            </a:r>
-            <a:endParaRPr lang="en-US" sz="1300" dirty="0"/>
-          </a:p>
-          <a:p>
-            <a:pPr indent="0" marL="0">
-              <a:spcAft>
-                <a:spcPts val="500"/>
-              </a:spcAft>
-              <a:buNone/>
-            </a:pPr>
-            <a:r>
-              <a:rPr lang="en-US" sz="1300" b="1" dirty="0">
-                <a:solidFill>
-                  <a:srgbClr val="0F2A5F"/>
-                </a:solidFill>
-              </a:rPr>
-              <a:t>normal distribution</a:t>
-            </a:r>
-            <a:pPr indent="0" marL="0">
-              <a:spcAft>
-                <a:spcPts val="500"/>
-              </a:spcAft>
-              <a:buNone/>
-            </a:pPr>
-            <a:r>
-              <a:rPr lang="en-US" sz="1300" dirty="0">
-                <a:solidFill>
-                  <a:srgbClr val="141B26"/>
-                </a:solidFill>
-              </a:rPr>
-              <a:t>  the bell-shaped curve seen when a continuous variable is plotted for a population</a:t>
-            </a:r>
-            <a:endParaRPr lang="en-US" sz="1300" dirty="0"/>
-          </a:p>
-          <a:p>
-            <a:pPr indent="0" marL="0">
-              <a:spcAft>
-                <a:spcPts val="500"/>
-              </a:spcAft>
-              <a:buNone/>
-            </a:pPr>
-            <a:r>
-              <a:rPr lang="en-US" sz="1300" b="1" dirty="0">
-                <a:solidFill>
-                  <a:srgbClr val="0F2A5F"/>
-                </a:solidFill>
-              </a:rPr>
-              <a:t>continuous variation</a:t>
-            </a:r>
-            <a:pPr indent="0" marL="0">
-              <a:spcAft>
-                <a:spcPts val="500"/>
-              </a:spcAft>
-              <a:buNone/>
-            </a:pPr>
-            <a:r>
-              <a:rPr lang="en-US" sz="1300" dirty="0">
-                <a:solidFill>
-                  <a:srgbClr val="141B26"/>
-                </a:solidFill>
-              </a:rPr>
-              <a:t>  variation that can take any value in a range, e.g. height</a:t>
-            </a:r>
-            <a:endParaRPr lang="en-US" sz="1300" dirty="0"/>
-          </a:p>
-          <a:p>
-            <a:pPr indent="0" marL="0">
-              <a:spcAft>
-                <a:spcPts val="500"/>
-              </a:spcAft>
-              <a:buNone/>
-            </a:pPr>
-            <a:r>
-              <a:rPr lang="en-US" sz="1300" b="1" dirty="0">
-                <a:solidFill>
-                  <a:srgbClr val="0F2A5F"/>
-                </a:solidFill>
-              </a:rPr>
-              <a:t>clinical trial</a:t>
-            </a:r>
-            <a:pPr indent="0" marL="0">
-              <a:spcAft>
-                <a:spcPts val="500"/>
-              </a:spcAft>
-              <a:buNone/>
-            </a:pPr>
-            <a:r>
-              <a:rPr lang="en-US" sz="1300" dirty="0">
-                <a:solidFill>
-                  <a:srgbClr val="141B26"/>
-                </a:solidFill>
-              </a:rPr>
-              <a:t>  a test of a medicine on groups of people</a:t>
-            </a:r>
-            <a:endParaRPr lang="en-US" sz="1300" dirty="0"/>
+              <a:buNone/>
+            </a:pPr>
+            <a:r>
+              <a:rPr lang="en-US" sz="1400" i="1" dirty="0">
+                <a:solidFill>
+                  <a:srgbClr val="5B6574"/>
+                </a:solidFill>
+              </a:rPr>
+              <a:t>Meanings are in the key words box on your worksheet.</a:t>
+            </a:r>
+            <a:endParaRPr lang="en-US" sz="1400" dirty="0"/>
           </a:p>
         </p:txBody>
       </p:sp>
@@ -6579,7 +6503,7 @@
         <p:spPr>
           <a:xfrm>
             <a:off x="548640" y="1371600"/>
-            <a:ext cx="10881360" cy="2377440"/>
+            <a:ext cx="10881360" cy="2651760"/>
           </a:xfrm>
           <a:prstGeom prst="rect">
             <a:avLst/>
@@ -6588,23 +6512,21 @@
           <a:ln/>
         </p:spPr>
         <p:txBody>
-          <a:bodyPr wrap="square" lIns="0" tIns="0" rIns="0" bIns="0" rtlCol="0" anchor="t">
-            <a:normAutofit/>
-          </a:bodyPr>
+          <a:bodyPr wrap="square" lIns="0" tIns="0" rIns="0" bIns="0" rtlCol="0" anchor="t"/>
           <a:lstStyle/>
           <a:p>
             <a:pPr indent="0" marL="0">
               <a:buNone/>
             </a:pPr>
             <a:r>
-              <a:rPr lang="en-US" sz="2800" b="1" dirty="0">
+              <a:rPr lang="en-US" sz="3000" b="1" dirty="0">
                 <a:solidFill>
                   <a:srgbClr val="0F2A5F"/>
                 </a:solidFill>
               </a:rPr>
               <a:t>'Statins are a new wonder drug.' 'Statins in new health scare.' Two headlines about the same medicine. Trials showed statins protect most people from heart attacks, but a few may be harmed. How can scientists tell which patients a drug helps?</a:t>
             </a:r>
-            <a:endParaRPr lang="en-US" sz="2800" dirty="0"/>
+            <a:endParaRPr lang="en-US" sz="3000" dirty="0"/>
           </a:p>
         </p:txBody>
       </p:sp>
@@ -6616,8 +6538,8 @@
         </p:nvSpPr>
         <p:spPr>
           <a:xfrm>
-            <a:off x="548640" y="3794760"/>
-            <a:ext cx="10881360" cy="2103120"/>
+            <a:off x="548640" y="4114800"/>
+            <a:ext cx="10881360" cy="1828800"/>
           </a:xfrm>
           <a:prstGeom prst="rect">
             <a:avLst/>
@@ -6626,9 +6548,7 @@
           <a:ln/>
         </p:spPr>
         <p:txBody>
-          <a:bodyPr wrap="square" lIns="0" tIns="0" rIns="0" bIns="0" rtlCol="0" anchor="t">
-            <a:normAutofit/>
-          </a:bodyPr>
+          <a:bodyPr wrap="square" lIns="0" tIns="0" rIns="0" bIns="0" rtlCol="0" anchor="t"/>
           <a:lstStyle/>
           <a:p>
             <a:pPr indent="0" marL="0">
@@ -6638,14 +6558,14 @@
               <a:buNone/>
             </a:pPr>
             <a:r>
-              <a:rPr lang="en-US" sz="1600" dirty="0">
+              <a:rPr lang="en-US" sz="2000" dirty="0">
                 <a:solidFill>
                   <a:srgbClr val="141B26"/>
                 </a:solidFill>
               </a:rPr>
               <a:t>Talk to a partner: what would you need to measure, and how would you compare the patients?</a:t>
             </a:r>
-            <a:endParaRPr lang="en-US" sz="1600" dirty="0"/>
+            <a:endParaRPr lang="en-US" sz="2000" dirty="0"/>
           </a:p>
         </p:txBody>
       </p:sp>
@@ -6845,14 +6765,14 @@
               <a:buNone/>
             </a:pPr>
             <a:r>
-              <a:rPr lang="en-US" sz="1600" dirty="0">
+              <a:rPr lang="en-US" sz="1500" dirty="0">
                 <a:solidFill>
                   <a:srgbClr val="141B26"/>
                 </a:solidFill>
               </a:rPr>
               <a:t>In a clinical trial, scientists often divide the people into groups, e.g. pulse rate above or below the median. Write the values in order first.</a:t>
             </a:r>
-            <a:endParaRPr lang="en-US" sz="1600" dirty="0"/>
+            <a:endParaRPr lang="en-US" sz="1500" dirty="0"/>
           </a:p>
         </p:txBody>
       </p:sp>
@@ -6923,16 +6843,14 @@
           <a:ln/>
         </p:spPr>
         <p:txBody>
-          <a:bodyPr wrap="square" lIns="0" tIns="0" rIns="0" bIns="0" rtlCol="0" anchor="ctr">
-            <a:normAutofit/>
-          </a:bodyPr>
+          <a:bodyPr wrap="square" lIns="0" tIns="0" rIns="0" bIns="0" rtlCol="0" anchor="ctr"/>
           <a:lstStyle/>
           <a:p>
             <a:pPr indent="0" marL="0">
               <a:buNone/>
             </a:pPr>
             <a:r>
-              <a:rPr lang="en-US" sz="1400" b="1" dirty="0">
+              <a:rPr lang="en-US" sz="1700" b="1" dirty="0">
                 <a:solidFill>
                   <a:srgbClr val="7B3A8E"/>
                 </a:solidFill>
@@ -6943,14 +6861,14 @@
               <a:buNone/>
             </a:pPr>
             <a:r>
-              <a:rPr lang="en-US" sz="1400" dirty="0">
+              <a:rPr lang="en-US" sz="1700" dirty="0">
                 <a:solidFill>
                   <a:srgbClr val="141B26"/>
                 </a:solidFill>
               </a:rPr>
               <a:t>Median = middle value. Quartiles = one quarter and three quarters of the way through. Interquartile range = UQ minus LQ.</a:t>
             </a:r>
-            <a:endParaRPr lang="en-US" sz="1400" dirty="0"/>
+            <a:endParaRPr lang="en-US" sz="1700" dirty="0"/>
           </a:p>
         </p:txBody>
       </p:sp>
@@ -7133,8 +7051,8 @@
         </p:nvSpPr>
         <p:spPr>
           <a:xfrm>
-            <a:off x="548640" y="6053328"/>
-            <a:ext cx="9601200" cy="292608"/>
+            <a:off x="548640" y="6035040"/>
+            <a:ext cx="9601200" cy="310896"/>
           </a:xfrm>
           <a:prstGeom prst="rect">
             <a:avLst/>
@@ -7150,7 +7068,7 @@
               <a:buNone/>
             </a:pPr>
             <a:r>
-              <a:rPr lang="en-US" sz="1200" b="1" dirty="0">
+              <a:rPr lang="en-US" sz="1400" b="1" dirty="0">
                 <a:solidFill>
                   <a:srgbClr val="7B3A8E"/>
                 </a:solidFill>
@@ -7161,14 +7079,14 @@
               <a:buNone/>
             </a:pPr>
             <a:r>
-              <a:rPr lang="en-US" sz="1200" dirty="0">
+              <a:rPr lang="en-US" sz="1400" dirty="0">
                 <a:solidFill>
                   <a:srgbClr val="7B3A8E"/>
                 </a:solidFill>
               </a:rPr>
               <a:t>normal distribution   ·   interquartile range   ·   range</a:t>
             </a:r>
-            <a:endParaRPr lang="en-US" sz="1200" dirty="0"/>
+            <a:endParaRPr lang="en-US" sz="1400" dirty="0"/>
           </a:p>
         </p:txBody>
       </p:sp>
@@ -7190,81 +7108,79 @@
           <a:ln/>
         </p:spPr>
         <p:txBody>
-          <a:bodyPr wrap="square" lIns="0" tIns="0" rIns="0" bIns="0" rtlCol="0" anchor="t">
-            <a:normAutofit/>
-          </a:bodyPr>
-          <a:lstStyle/>
-          <a:p>
-            <a:pPr marL="228600" indent="-228600">
+          <a:bodyPr wrap="square" lIns="0" tIns="0" rIns="0" bIns="0" rtlCol="0" anchor="t"/>
+          <a:lstStyle/>
+          <a:p>
+            <a:pPr marL="304800" indent="-304800">
               <a:spcAft>
-                <a:spcPts val="600"/>
+                <a:spcPts val="800"/>
               </a:spcAft>
               <a:buSzPct val="100000"/>
               <a:buChar char="•"/>
             </a:pPr>
             <a:r>
-              <a:rPr lang="en-US" sz="1600" dirty="0">
+              <a:rPr lang="en-US" sz="1900" dirty="0">
                 <a:solidFill>
                   <a:srgbClr val="141B26"/>
                 </a:solidFill>
               </a:rPr>
               <a:t>Height shows continuous variation: a bell-shaped normal distribution.</a:t>
             </a:r>
-            <a:endParaRPr lang="en-US" sz="1700" dirty="0"/>
-          </a:p>
-          <a:p>
-            <a:pPr marL="228600" indent="-228600">
+            <a:endParaRPr lang="en-US" sz="1900" dirty="0"/>
+          </a:p>
+          <a:p>
+            <a:pPr marL="304800" indent="-304800">
               <a:spcAft>
-                <a:spcPts val="600"/>
+                <a:spcPts val="800"/>
               </a:spcAft>
               <a:buSzPct val="100000"/>
               <a:buChar char="•"/>
             </a:pPr>
             <a:r>
-              <a:rPr lang="en-US" sz="1600" dirty="0">
+              <a:rPr lang="en-US" sz="1900" dirty="0">
                 <a:solidFill>
                   <a:srgbClr val="141B26"/>
                 </a:solidFill>
               </a:rPr>
               <a:t>The interquartile range is the spread of the middle 50% of the data.</a:t>
             </a:r>
-            <a:endParaRPr lang="en-US" sz="1700" dirty="0"/>
-          </a:p>
-          <a:p>
-            <a:pPr marL="228600" indent="-228600">
+            <a:endParaRPr lang="en-US" sz="1900" dirty="0"/>
+          </a:p>
+          <a:p>
+            <a:pPr marL="304800" indent="-304800">
               <a:spcAft>
-                <a:spcPts val="600"/>
+                <a:spcPts val="800"/>
               </a:spcAft>
               <a:buSzPct val="100000"/>
               <a:buChar char="•"/>
             </a:pPr>
             <a:r>
-              <a:rPr lang="en-US" sz="1600" dirty="0">
+              <a:rPr lang="en-US" sz="1900" dirty="0">
                 <a:solidFill>
                   <a:srgbClr val="141B26"/>
                 </a:solidFill>
               </a:rPr>
               <a:t>It ignores extreme values, so it is better than the range for comparing two groups.</a:t>
             </a:r>
-            <a:endParaRPr lang="en-US" sz="1700" dirty="0"/>
-          </a:p>
-          <a:p>
-            <a:pPr marL="228600" indent="-228600">
+            <a:endParaRPr lang="en-US" sz="1900" dirty="0"/>
+          </a:p>
+          <a:p>
+            <a:pPr marL="304800" indent="-304800">
               <a:spcAft>
-                <a:spcPts val="600"/>
+                <a:spcPts val="800"/>
               </a:spcAft>
               <a:buSzPct val="100000"/>
               <a:buChar char="•"/>
             </a:pPr>
             <a:r>
-              <a:rPr lang="en-US" sz="1600" dirty="0">
+              <a:rPr lang="en-US" sz="1900" dirty="0">
                 <a:solidFill>
                   <a:srgbClr val="141B26"/>
                 </a:solidFill>
               </a:rPr>
               <a:t>Small interquartile range: little variation. Large: a lot of variation.</a:t>
             </a:r>
-            <a:endParaRPr lang="en-US" sz="1700" dirty="0"/>
+            <a:endParaRPr lang="en-US" sz="1900" dirty="0"/>
           </a:p>
         </p:txBody>
       </p:sp>
@@ -7335,16 +7251,14 @@
           <a:ln/>
         </p:spPr>
         <p:txBody>
-          <a:bodyPr wrap="square" lIns="0" tIns="0" rIns="0" bIns="0" rtlCol="0" anchor="ctr">
-            <a:normAutofit/>
-          </a:bodyPr>
+          <a:bodyPr wrap="square" lIns="0" tIns="0" rIns="0" bIns="0" rtlCol="0" anchor="ctr"/>
           <a:lstStyle/>
           <a:p>
             <a:pPr indent="0" marL="0">
               <a:buNone/>
             </a:pPr>
             <a:r>
-              <a:rPr lang="en-US" sz="1400" b="1" dirty="0">
+              <a:rPr lang="en-US" sz="1700" b="1" dirty="0">
                 <a:solidFill>
                   <a:srgbClr val="7B3A8E"/>
                 </a:solidFill>
@@ -7355,14 +7269,14 @@
               <a:buNone/>
             </a:pPr>
             <a:r>
-              <a:rPr lang="en-US" sz="1400" dirty="0">
+              <a:rPr lang="en-US" sz="1700" dirty="0">
                 <a:solidFill>
                   <a:srgbClr val="141B26"/>
                 </a:solidFill>
               </a:rPr>
               <a:t>The interquartile range measures variation without being biased by extreme values.</a:t>
             </a:r>
-            <a:endParaRPr lang="en-US" sz="1400" dirty="0"/>
+            <a:endParaRPr lang="en-US" sz="1700" dirty="0"/>
           </a:p>
         </p:txBody>
       </p:sp>
@@ -7571,63 +7485,61 @@
           <a:ln/>
         </p:spPr>
         <p:txBody>
-          <a:bodyPr wrap="square" lIns="0" tIns="0" rIns="0" bIns="0" rtlCol="0" anchor="t">
-            <a:normAutofit/>
-          </a:bodyPr>
-          <a:lstStyle/>
-          <a:p>
-            <a:pPr marL="228600" indent="-228600">
+          <a:bodyPr wrap="square" lIns="0" tIns="0" rIns="0" bIns="0" rtlCol="0" anchor="t"/>
+          <a:lstStyle/>
+          <a:p>
+            <a:pPr marL="304800" indent="-304800">
               <a:spcAft>
-                <a:spcPts val="600"/>
+                <a:spcPts val="800"/>
               </a:spcAft>
               <a:buSzPct val="100000"/>
               <a:buChar char="•"/>
             </a:pPr>
             <a:r>
-              <a:rPr lang="en-US" sz="1500" dirty="0">
+              <a:rPr lang="en-US" sz="1800" dirty="0">
                 <a:solidFill>
                   <a:srgbClr val="141B26"/>
                 </a:solidFill>
               </a:rPr>
               <a:t>Tree A: narrow interquartile range. Most leaves are about the same length.</a:t>
             </a:r>
-            <a:endParaRPr lang="en-US" sz="1500" dirty="0"/>
-          </a:p>
-          <a:p>
-            <a:pPr marL="228600" indent="-228600">
+            <a:endParaRPr lang="en-US" sz="1800" dirty="0"/>
+          </a:p>
+          <a:p>
+            <a:pPr marL="304800" indent="-304800">
               <a:spcAft>
-                <a:spcPts val="600"/>
+                <a:spcPts val="800"/>
               </a:spcAft>
               <a:buSzPct val="100000"/>
               <a:buChar char="•"/>
             </a:pPr>
             <a:r>
-              <a:rPr lang="en-US" sz="1500" dirty="0">
+              <a:rPr lang="en-US" sz="1800" dirty="0">
                 <a:solidFill>
                   <a:srgbClr val="141B26"/>
                 </a:solidFill>
               </a:rPr>
               <a:t>Tree B: wide interquartile range. A lot of variation.</a:t>
             </a:r>
-            <a:endParaRPr lang="en-US" sz="1500" dirty="0"/>
-          </a:p>
-          <a:p>
-            <a:pPr marL="228600" indent="-228600">
+            <a:endParaRPr lang="en-US" sz="1800" dirty="0"/>
+          </a:p>
+          <a:p>
+            <a:pPr marL="304800" indent="-304800">
               <a:spcAft>
-                <a:spcPts val="600"/>
+                <a:spcPts val="800"/>
               </a:spcAft>
               <a:buSzPct val="100000"/>
               <a:buChar char="•"/>
             </a:pPr>
             <a:r>
-              <a:rPr lang="en-US" sz="1500" dirty="0">
+              <a:rPr lang="en-US" sz="1800" dirty="0">
                 <a:solidFill>
                   <a:srgbClr val="141B26"/>
                 </a:solidFill>
               </a:rPr>
               <a:t>On which tree would you find leaves much shorter or longer than the others?</a:t>
             </a:r>
-            <a:endParaRPr lang="en-US" sz="1500" dirty="0"/>
+            <a:endParaRPr lang="en-US" sz="1800" dirty="0"/>
           </a:p>
         </p:txBody>
       </p:sp>
@@ -7674,16 +7586,14 @@
           <a:ln/>
         </p:spPr>
         <p:txBody>
-          <a:bodyPr wrap="square" lIns="0" tIns="0" rIns="0" bIns="0" rtlCol="0" anchor="ctr">
-            <a:normAutofit/>
-          </a:bodyPr>
+          <a:bodyPr wrap="square" lIns="0" tIns="0" rIns="0" bIns="0" rtlCol="0" anchor="ctr"/>
           <a:lstStyle/>
           <a:p>
             <a:pPr indent="0" marL="0">
               <a:buNone/>
             </a:pPr>
             <a:r>
-              <a:rPr lang="en-US" sz="1400" b="1" dirty="0">
+              <a:rPr lang="en-US" sz="1700" b="1" dirty="0">
                 <a:solidFill>
                   <a:srgbClr val="7B3A8E"/>
                 </a:solidFill>
@@ -7694,14 +7604,14 @@
               <a:buNone/>
             </a:pPr>
             <a:r>
-              <a:rPr lang="en-US" sz="1400" dirty="0">
+              <a:rPr lang="en-US" sz="1700" dirty="0">
                 <a:solidFill>
                   <a:srgbClr val="141B26"/>
                 </a:solidFill>
               </a:rPr>
               <a:t>A wide interquartile range means more variation in the population.</a:t>
             </a:r>
-            <a:endParaRPr lang="en-US" sz="1400" dirty="0"/>
+            <a:endParaRPr lang="en-US" sz="1700" dirty="0"/>
           </a:p>
         </p:txBody>
       </p:sp>
@@ -7910,63 +7820,61 @@
           <a:ln/>
         </p:spPr>
         <p:txBody>
-          <a:bodyPr wrap="square" lIns="0" tIns="0" rIns="0" bIns="0" rtlCol="0" anchor="t">
-            <a:normAutofit/>
-          </a:bodyPr>
-          <a:lstStyle/>
-          <a:p>
-            <a:pPr marL="228600" indent="-228600">
+          <a:bodyPr wrap="square" lIns="0" tIns="0" rIns="0" bIns="0" rtlCol="0" anchor="t"/>
+          <a:lstStyle/>
+          <a:p>
+            <a:pPr marL="304800" indent="-304800">
               <a:spcAft>
-                <a:spcPts val="600"/>
+                <a:spcPts val="800"/>
               </a:spcAft>
               <a:buSzPct val="100000"/>
               <a:buChar char="•"/>
             </a:pPr>
             <a:r>
-              <a:rPr lang="en-US" sz="1500" dirty="0">
+              <a:rPr lang="en-US" sz="1800" dirty="0">
                 <a:solidFill>
                   <a:srgbClr val="141B26"/>
                 </a:solidFill>
               </a:rPr>
               <a:t>Patients were measured for how well they absorb cholesterol and split into quartiles (boundaries 107, 126, 148).</a:t>
             </a:r>
-            <a:endParaRPr lang="en-US" sz="1500" dirty="0"/>
-          </a:p>
-          <a:p>
-            <a:pPr marL="228600" indent="-228600">
+            <a:endParaRPr lang="en-US" sz="1800" dirty="0"/>
+          </a:p>
+          <a:p>
+            <a:pPr marL="304800" indent="-304800">
               <a:spcAft>
-                <a:spcPts val="600"/>
+                <a:spcPts val="800"/>
               </a:spcAft>
               <a:buSzPct val="100000"/>
               <a:buChar char="•"/>
             </a:pPr>
             <a:r>
-              <a:rPr lang="en-US" sz="1500" dirty="0">
+              <a:rPr lang="en-US" sz="1800" dirty="0">
                 <a:solidFill>
                   <a:srgbClr val="141B26"/>
                 </a:solidFill>
               </a:rPr>
               <a:t>In three quartiles the risk fell. In the top quartile it rose.</a:t>
             </a:r>
-            <a:endParaRPr lang="en-US" sz="1500" dirty="0"/>
-          </a:p>
-          <a:p>
-            <a:pPr marL="228600" indent="-228600">
+            <a:endParaRPr lang="en-US" sz="1800" dirty="0"/>
+          </a:p>
+          <a:p>
+            <a:pPr marL="304800" indent="-304800">
               <a:spcAft>
-                <a:spcPts val="600"/>
+                <a:spcPts val="800"/>
               </a:spcAft>
               <a:buSzPct val="100000"/>
               <a:buChar char="•"/>
             </a:pPr>
             <a:r>
-              <a:rPr lang="en-US" sz="1500" dirty="0">
+              <a:rPr lang="en-US" sz="1800" dirty="0">
                 <a:solidFill>
                   <a:srgbClr val="141B26"/>
                 </a:solidFill>
               </a:rPr>
               <a:t>Splitting the data shows the drug helps most people, but not everyone.</a:t>
             </a:r>
-            <a:endParaRPr lang="en-US" sz="1500" dirty="0"/>
+            <a:endParaRPr lang="en-US" sz="1800" dirty="0"/>
           </a:p>
         </p:txBody>
       </p:sp>
@@ -8013,16 +7921,14 @@
           <a:ln/>
         </p:spPr>
         <p:txBody>
-          <a:bodyPr wrap="square" lIns="0" tIns="0" rIns="0" bIns="0" rtlCol="0" anchor="ctr">
-            <a:normAutofit/>
-          </a:bodyPr>
+          <a:bodyPr wrap="square" lIns="0" tIns="0" rIns="0" bIns="0" rtlCol="0" anchor="ctr"/>
           <a:lstStyle/>
           <a:p>
             <a:pPr indent="0" marL="0">
               <a:buNone/>
             </a:pPr>
             <a:r>
-              <a:rPr lang="en-US" sz="1400" b="1" dirty="0">
+              <a:rPr lang="en-US" sz="1700" b="1" dirty="0">
                 <a:solidFill>
                   <a:srgbClr val="7B3A8E"/>
                 </a:solidFill>
@@ -8033,14 +7939,14 @@
               <a:buNone/>
             </a:pPr>
             <a:r>
-              <a:rPr lang="en-US" sz="1400" dirty="0">
+              <a:rPr lang="en-US" sz="1700" dirty="0">
                 <a:solidFill>
                   <a:srgbClr val="141B26"/>
                 </a:solidFill>
               </a:rPr>
               <a:t>Quartiles let scientists compare groups inside a large set of data.</a:t>
             </a:r>
-            <a:endParaRPr lang="en-US" sz="1400" dirty="0"/>
+            <a:endParaRPr lang="en-US" sz="1700" dirty="0"/>
           </a:p>
         </p:txBody>
       </p:sp>
@@ -8240,14 +8146,14 @@
               <a:buNone/>
             </a:pPr>
             <a:r>
-              <a:rPr lang="en-US" sz="1400" i="1" dirty="0">
+              <a:rPr lang="en-US" sz="1600" i="1" dirty="0">
                 <a:solidFill>
                   <a:srgbClr val="5B6574"/>
                 </a:solidFill>
               </a:rPr>
               <a:t>Mini whiteboards. One answer each, then we check.</a:t>
             </a:r>
-            <a:endParaRPr lang="en-US" sz="1400" dirty="0"/>
+            <a:endParaRPr lang="en-US" sz="1600" dirty="0"/>
           </a:p>
         </p:txBody>
       </p:sp>
@@ -8296,16 +8202,14 @@
           <a:ln/>
         </p:spPr>
         <p:txBody>
-          <a:bodyPr wrap="square" lIns="0" tIns="0" rIns="0" bIns="0" rtlCol="0" anchor="ctr">
-            <a:normAutofit/>
-          </a:bodyPr>
+          <a:bodyPr wrap="square" lIns="0" tIns="0" rIns="0" bIns="0" rtlCol="0" anchor="ctr"/>
           <a:lstStyle/>
           <a:p>
             <a:pPr indent="0" marL="0">
               <a:buNone/>
             </a:pPr>
             <a:r>
-              <a:rPr lang="en-US" sz="1600" b="1" dirty="0">
+              <a:rPr lang="en-US" sz="2000" b="1" dirty="0">
                 <a:solidFill>
                   <a:srgbClr val="7B3A8E"/>
                 </a:solidFill>
@@ -8316,14 +8220,14 @@
               <a:buNone/>
             </a:pPr>
             <a:r>
-              <a:rPr lang="en-US" sz="1600" dirty="0">
+              <a:rPr lang="en-US" sz="2000" dirty="0">
                 <a:solidFill>
                   <a:srgbClr val="141B26"/>
                 </a:solidFill>
               </a:rPr>
               <a:t>Find the median of 3, 9, 4, 7, 5.</a:t>
             </a:r>
-            <a:endParaRPr lang="en-US" sz="1600" dirty="0"/>
+            <a:endParaRPr lang="en-US" sz="2000" dirty="0"/>
           </a:p>
         </p:txBody>
       </p:sp>
@@ -8372,16 +8276,14 @@
           <a:ln/>
         </p:spPr>
         <p:txBody>
-          <a:bodyPr wrap="square" lIns="0" tIns="0" rIns="0" bIns="0" rtlCol="0" anchor="ctr">
-            <a:normAutofit/>
-          </a:bodyPr>
+          <a:bodyPr wrap="square" lIns="0" tIns="0" rIns="0" bIns="0" rtlCol="0" anchor="ctr"/>
           <a:lstStyle/>
           <a:p>
             <a:pPr indent="0" marL="0">
               <a:buNone/>
             </a:pPr>
             <a:r>
-              <a:rPr lang="en-US" sz="1600" b="1" dirty="0">
+              <a:rPr lang="en-US" sz="2000" b="1" dirty="0">
                 <a:solidFill>
                   <a:srgbClr val="7B3A8E"/>
                 </a:solidFill>
@@ -8392,14 +8294,14 @@
               <a:buNone/>
             </a:pPr>
             <a:r>
-              <a:rPr lang="en-US" sz="1600" dirty="0">
+              <a:rPr lang="en-US" sz="2000" dirty="0">
                 <a:solidFill>
                   <a:srgbClr val="141B26"/>
                 </a:solidFill>
               </a:rPr>
               <a:t>In the ordered set 1 2 3 3 4 5 6 7 7 8 9, what is the lower quartile?</a:t>
             </a:r>
-            <a:endParaRPr lang="en-US" sz="1600" dirty="0"/>
+            <a:endParaRPr lang="en-US" sz="2000" dirty="0"/>
           </a:p>
         </p:txBody>
       </p:sp>
@@ -8448,16 +8350,14 @@
           <a:ln/>
         </p:spPr>
         <p:txBody>
-          <a:bodyPr wrap="square" lIns="0" tIns="0" rIns="0" bIns="0" rtlCol="0" anchor="ctr">
-            <a:normAutofit/>
-          </a:bodyPr>
+          <a:bodyPr wrap="square" lIns="0" tIns="0" rIns="0" bIns="0" rtlCol="0" anchor="ctr"/>
           <a:lstStyle/>
           <a:p>
             <a:pPr indent="0" marL="0">
               <a:buNone/>
             </a:pPr>
             <a:r>
-              <a:rPr lang="en-US" sz="1600" b="1" dirty="0">
+              <a:rPr lang="en-US" sz="2000" b="1" dirty="0">
                 <a:solidFill>
                   <a:srgbClr val="7B3A8E"/>
                 </a:solidFill>
@@ -8468,14 +8368,14 @@
               <a:buNone/>
             </a:pPr>
             <a:r>
-              <a:rPr lang="en-US" sz="1600" dirty="0">
+              <a:rPr lang="en-US" sz="2000" dirty="0">
                 <a:solidFill>
                   <a:srgbClr val="141B26"/>
                 </a:solidFill>
               </a:rPr>
               <a:t>UQ is 7 and LQ is 3. What is the interquartile range?</a:t>
             </a:r>
-            <a:endParaRPr lang="en-US" sz="1600" dirty="0"/>
+            <a:endParaRPr lang="en-US" sz="2000" dirty="0"/>
           </a:p>
         </p:txBody>
       </p:sp>
@@ -8524,16 +8424,14 @@
           <a:ln/>
         </p:spPr>
         <p:txBody>
-          <a:bodyPr wrap="square" lIns="0" tIns="0" rIns="0" bIns="0" rtlCol="0" anchor="ctr">
-            <a:normAutofit/>
-          </a:bodyPr>
+          <a:bodyPr wrap="square" lIns="0" tIns="0" rIns="0" bIns="0" rtlCol="0" anchor="ctr"/>
           <a:lstStyle/>
           <a:p>
             <a:pPr indent="0" marL="0">
               <a:buNone/>
             </a:pPr>
             <a:r>
-              <a:rPr lang="en-US" sz="1600" b="1" dirty="0">
+              <a:rPr lang="en-US" sz="2000" b="1" dirty="0">
                 <a:solidFill>
                   <a:srgbClr val="7B3A8E"/>
                 </a:solidFill>
@@ -8544,14 +8442,14 @@
               <a:buNone/>
             </a:pPr>
             <a:r>
-              <a:rPr lang="en-US" sz="1600" dirty="0">
+              <a:rPr lang="en-US" sz="2000" dirty="0">
                 <a:solidFill>
                   <a:srgbClr val="141B26"/>
                 </a:solidFill>
               </a:rPr>
               <a:t>Does the interquartile range use the smallest and largest values? Yes or no.</a:t>
             </a:r>
-            <a:endParaRPr lang="en-US" sz="1600" dirty="0"/>
+            <a:endParaRPr lang="en-US" sz="2000" dirty="0"/>
           </a:p>
         </p:txBody>
       </p:sp>
@@ -8600,16 +8498,14 @@
           <a:ln/>
         </p:spPr>
         <p:txBody>
-          <a:bodyPr wrap="square" lIns="0" tIns="0" rIns="0" bIns="0" rtlCol="0" anchor="ctr">
-            <a:normAutofit/>
-          </a:bodyPr>
+          <a:bodyPr wrap="square" lIns="0" tIns="0" rIns="0" bIns="0" rtlCol="0" anchor="ctr"/>
           <a:lstStyle/>
           <a:p>
             <a:pPr indent="0" marL="0">
               <a:buNone/>
             </a:pPr>
             <a:r>
-              <a:rPr lang="en-US" sz="1600" b="1" dirty="0">
+              <a:rPr lang="en-US" sz="2000" b="1" dirty="0">
                 <a:solidFill>
                   <a:srgbClr val="7B3A8E"/>
                 </a:solidFill>
@@ -8620,14 +8516,14 @@
               <a:buNone/>
             </a:pPr>
             <a:r>
-              <a:rPr lang="en-US" sz="1600" dirty="0">
+              <a:rPr lang="en-US" sz="2000" dirty="0">
                 <a:solidFill>
                   <a:srgbClr val="141B26"/>
                 </a:solidFill>
               </a:rPr>
               <a:t>What shape is a normal distribution?</a:t>
             </a:r>
-            <a:endParaRPr lang="en-US" sz="1600" dirty="0"/>
+            <a:endParaRPr lang="en-US" sz="2000" dirty="0"/>
           </a:p>
         </p:txBody>
       </p:sp>
